--- a/Final_Revision/Exam_Practice/FR-L06_Speaking_Workshop_Final_Mock_Exam.pptx
+++ b/Final_Revision/Exam_Practice/FR-L06_Speaking_Workshop_Final_Mock_Exam.pptx
@@ -615,7 +615,11 @@
           <a:lstStyle/>
           <a:p>
             <a:r>
-              <a:rPr lang="en-US" dirty="0"/>
+              <a:rPr lang="ar-SA" dirty="0">
+                <a:latin typeface="Amiri" pitchFamily="2" charset="-78"/>
+                <a:ea typeface="Amiri" pitchFamily="2" charset="-78"/>
+                <a:cs typeface="Amiri" pitchFamily="2" charset="-78"/>
+              </a:rPr>
               <a:t>ROLE PLAY C (Develop) — a bookshop.
 SET-UP IN THE BREAKOUT ROOM: A = examiner (reads the left column ONLY — the questions, in order), B = candidate (sees the task column; Core may use the help column), C = observer (ticks the feedback checklist). 1 minute preparation, about 3 minutes speaking, 1 minute feedback, then rotate.
 Task ! is the unexpected question: in the exam the candidate has not seen it — the examiner should read it without warning.
@@ -707,7 +711,11 @@
           <a:lstStyle/>
           <a:p>
             <a:r>
-              <a:rPr lang="en-US" dirty="0"/>
+              <a:rPr lang="ar-SA" dirty="0">
+                <a:latin typeface="Amiri" pitchFamily="2" charset="-78"/>
+                <a:ea typeface="Amiri" pitchFamily="2" charset="-78"/>
+                <a:cs typeface="Amiri" pitchFamily="2" charset="-78"/>
+              </a:rPr>
               <a:t>ROLE PLAY D (Stretch) — a school podcast.
 SET-UP IN THE BREAKOUT ROOM: A = examiner (reads the left column ONLY — the questions, in order), B = candidate (sees the task column; Core may use the help column), C = observer (ticks the feedback checklist). 1 minute preparation, about 3 minutes speaking, 1 minute feedback, then rotate.
 Task ! is the unexpected question: in the exam the candidate has not seen it — the examiner should read it without warning.
@@ -1243,7 +1251,11 @@
           <a:lstStyle/>
           <a:p>
             <a:r>
-              <a:rPr lang="en-US" dirty="0"/>
+              <a:rPr lang="ar-SA" dirty="0">
+                <a:latin typeface="Amiri" pitchFamily="2" charset="-78"/>
+                <a:ea typeface="Amiri" pitchFamily="2" charset="-78"/>
+                <a:cs typeface="Amiri" pitchFamily="2" charset="-78"/>
+              </a:rPr>
               <a:t>TOPIC CONVERSATION — Core. Examiner asks the questions in order and may add “لِمَاذَا؟ / هَلْ يُمْكِنُ أَنْ تَشْرَحَ أَكْثَرَ؟” to push for more. Candidate aims for one full, accurate sentence per question.
 </a:t>
             </a:r>
@@ -1332,7 +1344,11 @@
           <a:lstStyle/>
           <a:p>
             <a:r>
-              <a:rPr lang="en-US" dirty="0"/>
+              <a:rPr lang="ar-SA" dirty="0">
+                <a:latin typeface="Amiri" pitchFamily="2" charset="-78"/>
+                <a:ea typeface="Amiri" pitchFamily="2" charset="-78"/>
+                <a:cs typeface="Amiri" pitchFamily="2" charset="-78"/>
+              </a:rPr>
               <a:t>TOPIC CONVERSATION — Develop. Examiner asks the questions in order and may add “لِمَاذَا؟ / هَلْ يُمْكِنُ أَنْ تَشْرَحَ أَكْثَرَ؟” to push for more. Candidate aims for two or three sentences, a reason and two time frames.
 </a:t>
             </a:r>
@@ -1421,7 +1437,11 @@
           <a:lstStyle/>
           <a:p>
             <a:r>
-              <a:rPr lang="en-US" dirty="0"/>
+              <a:rPr lang="ar-SA" dirty="0">
+                <a:latin typeface="Amiri" pitchFamily="2" charset="-78"/>
+                <a:ea typeface="Amiri" pitchFamily="2" charset="-78"/>
+                <a:cs typeface="Amiri" pitchFamily="2" charset="-78"/>
+              </a:rPr>
               <a:t>TOPIC CONVERSATION — Stretch. Examiner asks the questions in order and may add “لِمَاذَا؟ / هَلْ يُمْكِنُ أَنْ تَشْرَحَ أَكْثَرَ؟” to push for more. Candidate aims for a developed, balanced answer with a top-band structure.
 </a:t>
             </a:r>
@@ -1510,7 +1530,11 @@
           <a:lstStyle/>
           <a:p>
             <a:r>
-              <a:rPr lang="en-US" dirty="0"/>
+              <a:rPr lang="ar-SA" dirty="0">
+                <a:latin typeface="Amiri" pitchFamily="2" charset="-78"/>
+                <a:ea typeface="Amiri" pitchFamily="2" charset="-78"/>
+                <a:cs typeface="Amiri" pitchFamily="2" charset="-78"/>
+              </a:rPr>
               <a:t>WELCOME (1 min) — while students join.
 • Greet each student by name as they arrive: السَّلَامُ عَلَيْكُمْ. Take the register (Pastoral Tracker: attendance 0/1).
 • 2-MINUTE CHECK-IN (SEND training): a private chat to any student who seemed unsettled last lesson — “Are you okay today? 👍 / 👎”.
@@ -2224,7 +2248,11 @@
           <a:lstStyle/>
           <a:p>
             <a:r>
-              <a:rPr lang="en-US" dirty="0"/>
+              <a:rPr lang="ar-SA" dirty="0">
+                <a:latin typeface="Amiri" pitchFamily="2" charset="-78"/>
+                <a:ea typeface="Amiri" pitchFamily="2" charset="-78"/>
+                <a:cs typeface="Amiri" pitchFamily="2" charset="-78"/>
+              </a:rPr>
               <a:t>TEACH (3 min). Role play = precise and complete; conversation = develop. Choral repetition of the repair phrases. To a girl: تُعِيدِي.</a:t>
             </a:r>
             <a:endParaRPr lang="en-US" dirty="0"/>
@@ -2576,7 +2604,11 @@
           <a:lstStyle/>
           <a:p>
             <a:r>
-              <a:rPr lang="en-US" dirty="0"/>
+              <a:rPr lang="ar-SA" dirty="0">
+                <a:latin typeface="Amiri" pitchFamily="2" charset="-78"/>
+                <a:ea typeface="Amiri" pitchFamily="2" charset="-78"/>
+                <a:cs typeface="Amiri" pitchFamily="2" charset="-78"/>
+              </a:rPr>
               <a:t>ROLE PLAY A (Core) — a café in Amman.
 SET-UP IN THE BREAKOUT ROOM: A = examiner (reads the left column ONLY — the questions, in order), B = candidate (sees the task column; Core may use the help column), C = observer (ticks the feedback checklist). 1 minute preparation, about 3 minutes speaking, 1 minute feedback, then rotate.
 Task ! is the unexpected question: in the exam the candidate has not seen it — the examiner should read it without warning.
@@ -2668,7 +2700,11 @@
           <a:lstStyle/>
           <a:p>
             <a:r>
-              <a:rPr lang="en-US" dirty="0"/>
+              <a:rPr lang="ar-SA" dirty="0">
+                <a:latin typeface="Amiri" pitchFamily="2" charset="-78"/>
+                <a:ea typeface="Amiri" pitchFamily="2" charset="-78"/>
+                <a:cs typeface="Amiri" pitchFamily="2" charset="-78"/>
+              </a:rPr>
               <a:t>ROLE PLAY B (Core+) — a pharmacy.
 SET-UP IN THE BREAKOUT ROOM: A = examiner (reads the left column ONLY — the questions, in order), B = candidate (sees the task column; Core may use the help column), C = observer (ticks the feedback checklist). 1 minute preparation, about 3 minutes speaking, 1 minute feedback, then rotate.
 Task ! is the unexpected question: in the exam the candidate has not seen it — the examiner should read it without warning.
@@ -3156,6 +3192,7 @@
                   <a:srgbClr val="D4AF37"/>
                 </a:solidFill>
                 <a:latin typeface="Amiri" pitchFamily="2" charset="-78"/>
+                <a:ea typeface="Amiri" pitchFamily="2" charset="-78"/>
                 <a:cs typeface="Amiri" pitchFamily="2" charset="-78"/>
               </a:rPr>
               <a:t>م</a:t>
@@ -3362,6 +3399,7 @@
                   <a:srgbClr val="D4AF37"/>
                 </a:solidFill>
                 <a:latin typeface="Amiri" pitchFamily="2" charset="-78"/>
+                <a:ea typeface="Amiri" pitchFamily="2" charset="-78"/>
                 <a:cs typeface="Amiri" pitchFamily="2" charset="-78"/>
               </a:rPr>
               <a:t>وَرْشَةُ التَّحَدُّثِ — الامْتِحَانُ التَّجْرِيبِيُّ النِّهَائِيُّ</a:t>
@@ -3819,6 +3857,7 @@
                   <a:srgbClr val="D4AF37"/>
                 </a:solidFill>
                 <a:latin typeface="Amiri" pitchFamily="2" charset="-78"/>
+                <a:ea typeface="Amiri" pitchFamily="2" charset="-78"/>
                 <a:cs typeface="Amiri" pitchFamily="2" charset="-78"/>
               </a:rPr>
               <a:t>م</a:t>
@@ -4139,6 +4178,7 @@
                   <a:srgbClr val="8A6D1E"/>
                 </a:solidFill>
                 <a:latin typeface="Amiri" pitchFamily="2" charset="-78"/>
+                <a:ea typeface="Amiri" pitchFamily="2" charset="-78"/>
                 <a:cs typeface="Amiri" pitchFamily="2" charset="-78"/>
               </a:rPr>
               <a:t>مُقَابَلَةُ عَمَلٍ جُزْئِيٍّ</a:t>
@@ -4419,6 +4459,7 @@
                   <a:srgbClr val="1B3B6F"/>
                 </a:solidFill>
                 <a:latin typeface="Amiri" pitchFamily="2" charset="-78"/>
+                <a:ea typeface="Amiri" pitchFamily="2" charset="-78"/>
                 <a:cs typeface="Amiri" pitchFamily="2" charset="-78"/>
               </a:rPr>
               <a:t>لِأَنِّي … ، وَأَيْضًا لِأَنَّ …</a:t>
@@ -4495,6 +4536,7 @@
                   <a:srgbClr val="1B3B6F"/>
                 </a:solidFill>
                 <a:latin typeface="Amiri" pitchFamily="2" charset="-78"/>
+                <a:ea typeface="Amiri" pitchFamily="2" charset="-78"/>
                 <a:cs typeface="Amiri" pitchFamily="2" charset="-78"/>
               </a:rPr>
               <a:t>لِمَاذَا تُرِيدُ أَنْ تَعْمَلَ فِي مَكْتَبَتِنَا؟</a:t>
@@ -4598,6 +4640,7 @@
                   <a:srgbClr val="1B3B6F"/>
                 </a:solidFill>
                 <a:latin typeface="Amiri" pitchFamily="2" charset="-78"/>
+                <a:ea typeface="Amiri" pitchFamily="2" charset="-78"/>
                 <a:cs typeface="Amiri" pitchFamily="2" charset="-78"/>
               </a:rPr>
               <a:t>أُجِيدُ … ؛ مَثَلًا …</a:t>
@@ -4674,6 +4717,7 @@
                   <a:srgbClr val="1B3B6F"/>
                 </a:solidFill>
                 <a:latin typeface="Amiri" pitchFamily="2" charset="-78"/>
+                <a:ea typeface="Amiri" pitchFamily="2" charset="-78"/>
                 <a:cs typeface="Amiri" pitchFamily="2" charset="-78"/>
               </a:rPr>
               <a:t>مَا مَهَارَاتُكَ؟</a:t>
@@ -4777,6 +4821,7 @@
                   <a:srgbClr val="1B3B6F"/>
                 </a:solidFill>
                 <a:latin typeface="Amiri" pitchFamily="2" charset="-78"/>
+                <a:ea typeface="Amiri" pitchFamily="2" charset="-78"/>
                 <a:cs typeface="Amiri" pitchFamily="2" charset="-78"/>
               </a:rPr>
               <a:t>نَعَمْ، فِي … عَمِلْتُ … فَتَعَلَّمْتُ …</a:t>
@@ -4853,6 +4898,7 @@
                   <a:srgbClr val="1B3B6F"/>
                 </a:solidFill>
                 <a:latin typeface="Amiri" pitchFamily="2" charset="-78"/>
+                <a:ea typeface="Amiri" pitchFamily="2" charset="-78"/>
                 <a:cs typeface="Amiri" pitchFamily="2" charset="-78"/>
               </a:rPr>
               <a:t>هَلْ عَمِلْتَ مِنْ قَبْلُ؟</a:t>
@@ -4956,6 +5002,7 @@
                   <a:srgbClr val="1B3B6F"/>
                 </a:solidFill>
                 <a:latin typeface="Amiri" pitchFamily="2" charset="-78"/>
+                <a:ea typeface="Amiri" pitchFamily="2" charset="-78"/>
                 <a:cs typeface="Amiri" pitchFamily="2" charset="-78"/>
               </a:rPr>
               <a:t>نَعَمْ، يُنَاسِبُنِي … أَمَّا يَوْمُ الأَحَدِ فَأُخَصِّصُهُ …</a:t>
@@ -5032,6 +5079,7 @@
                   <a:srgbClr val="1B3B6F"/>
                 </a:solidFill>
                 <a:latin typeface="Amiri" pitchFamily="2" charset="-78"/>
+                <a:ea typeface="Amiri" pitchFamily="2" charset="-78"/>
                 <a:cs typeface="Amiri" pitchFamily="2" charset="-78"/>
               </a:rPr>
               <a:t>هٰذَا العَمَلُ يَوْمَ السَّبْتِ فَقَطْ. هَلْ يُنَاسِبُكَ؟</a:t>
@@ -5135,6 +5183,7 @@
                   <a:srgbClr val="1B3B6F"/>
                 </a:solidFill>
                 <a:latin typeface="Amiri" pitchFamily="2" charset="-78"/>
+                <a:ea typeface="Amiri" pitchFamily="2" charset="-78"/>
                 <a:cs typeface="Amiri" pitchFamily="2" charset="-78"/>
               </a:rPr>
               <a:t>سَأُوَفِّرُ … لِكَيْ …</a:t>
@@ -5211,6 +5260,7 @@
                   <a:srgbClr val="1B3B6F"/>
                 </a:solidFill>
                 <a:latin typeface="Amiri" pitchFamily="2" charset="-78"/>
+                <a:ea typeface="Amiri" pitchFamily="2" charset="-78"/>
                 <a:cs typeface="Amiri" pitchFamily="2" charset="-78"/>
               </a:rPr>
               <a:t>وَكَيْفَ سَتَصْرِفُ رَاتِبَكَ؟</a:t>
@@ -5420,6 +5470,7 @@
                   <a:srgbClr val="D4AF37"/>
                 </a:solidFill>
                 <a:latin typeface="Amiri" pitchFamily="2" charset="-78"/>
+                <a:ea typeface="Amiri" pitchFamily="2" charset="-78"/>
                 <a:cs typeface="Amiri" pitchFamily="2" charset="-78"/>
               </a:rPr>
               <a:t>م</a:t>
@@ -5740,6 +5791,7 @@
                   <a:srgbClr val="8A6D1E"/>
                 </a:solidFill>
                 <a:latin typeface="Amiri" pitchFamily="2" charset="-78"/>
+                <a:ea typeface="Amiri" pitchFamily="2" charset="-78"/>
                 <a:cs typeface="Amiri" pitchFamily="2" charset="-78"/>
               </a:rPr>
               <a:t>هَلْ يَجِبُ أَنْ يَتَعَلَّمَ كُلُّ طَالِبٍ لُغَةً أَجْنَبِيَّةً؟</a:t>
@@ -6020,6 +6072,7 @@
                   <a:srgbClr val="1B3B6F"/>
                 </a:solidFill>
                 <a:latin typeface="Amiri" pitchFamily="2" charset="-78"/>
+                <a:ea typeface="Amiri" pitchFamily="2" charset="-78"/>
                 <a:cs typeface="Amiri" pitchFamily="2" charset="-78"/>
               </a:rPr>
               <a:t>فِي رَأْيِي … لِأَنَّهَا … وَلِأَنَّهَا …</a:t>
@@ -6096,6 +6149,7 @@
                   <a:srgbClr val="1B3B6F"/>
                 </a:solidFill>
                 <a:latin typeface="Amiri" pitchFamily="2" charset="-78"/>
+                <a:ea typeface="Amiri" pitchFamily="2" charset="-78"/>
                 <a:cs typeface="Amiri" pitchFamily="2" charset="-78"/>
               </a:rPr>
               <a:t>هَلْ يَجِبُ أَنْ تَكُونَ اللُّغَاتُ إِلْزَامِيَّةً؟</a:t>
@@ -6199,6 +6253,7 @@
                   <a:srgbClr val="1B3B6F"/>
                 </a:solidFill>
                 <a:latin typeface="Amiri" pitchFamily="2" charset="-78"/>
+                <a:ea typeface="Amiri" pitchFamily="2" charset="-78"/>
                 <a:cs typeface="Amiri" pitchFamily="2" charset="-78"/>
               </a:rPr>
               <a:t>عِنْدَمَا … ، اسْتَطَعْتُ أَنْ … مِمَّا …</a:t>
@@ -6275,6 +6330,7 @@
                   <a:srgbClr val="1B3B6F"/>
                 </a:solidFill>
                 <a:latin typeface="Amiri" pitchFamily="2" charset="-78"/>
+                <a:ea typeface="Amiri" pitchFamily="2" charset="-78"/>
                 <a:cs typeface="Amiri" pitchFamily="2" charset="-78"/>
               </a:rPr>
               <a:t>أَعْطِنَا مِثَالًا مِنْ حَيَاتِكَ.</a:t>
@@ -6378,6 +6434,7 @@
                   <a:srgbClr val="1B3B6F"/>
                 </a:solidFill>
                 <a:latin typeface="Amiri" pitchFamily="2" charset="-78"/>
+                <a:ea typeface="Amiri" pitchFamily="2" charset="-78"/>
                 <a:cs typeface="Amiri" pitchFamily="2" charset="-78"/>
               </a:rPr>
               <a:t>صَحِيحٌ أَنَّ … غَيْرَ أَنَّ …</a:t>
@@ -6454,6 +6511,7 @@
                   <a:srgbClr val="1B3B6F"/>
                 </a:solidFill>
                 <a:latin typeface="Amiri" pitchFamily="2" charset="-78"/>
+                <a:ea typeface="Amiri" pitchFamily="2" charset="-78"/>
                 <a:cs typeface="Amiri" pitchFamily="2" charset="-78"/>
               </a:rPr>
               <a:t>لٰكِنَّ الإِنْجِلِيزِيَّةَ تَكْفِي، أَلَيْسَ كَذٰلِكَ؟</a:t>
@@ -6557,6 +6615,7 @@
                   <a:srgbClr val="1B3B6F"/>
                 </a:solidFill>
                 <a:latin typeface="Amiri" pitchFamily="2" charset="-78"/>
+                <a:ea typeface="Amiri" pitchFamily="2" charset="-78"/>
                 <a:cs typeface="Amiri" pitchFamily="2" charset="-78"/>
               </a:rPr>
               <a:t>يَجِبُ أَنْ تُدَرَّسَ … وَأَنْ …</a:t>
@@ -6633,6 +6692,7 @@
                   <a:srgbClr val="1B3B6F"/>
                 </a:solidFill>
                 <a:latin typeface="Amiri" pitchFamily="2" charset="-78"/>
+                <a:ea typeface="Amiri" pitchFamily="2" charset="-78"/>
                 <a:cs typeface="Amiri" pitchFamily="2" charset="-78"/>
               </a:rPr>
               <a:t>كَيْفَ نُشَجِّعُ الطُّلَّابَ؟</a:t>
@@ -6736,6 +6796,7 @@
                   <a:srgbClr val="1B3B6F"/>
                 </a:solidFill>
                 <a:latin typeface="Amiri" pitchFamily="2" charset="-78"/>
+                <a:ea typeface="Amiri" pitchFamily="2" charset="-78"/>
                 <a:cs typeface="Amiri" pitchFamily="2" charset="-78"/>
               </a:rPr>
               <a:t>لَوْ تَعَلَّمْتُ …، لَاخْتَرْتُ … لِأَنَّ …</a:t>
@@ -6812,6 +6873,7 @@
                   <a:srgbClr val="1B3B6F"/>
                 </a:solidFill>
                 <a:latin typeface="Amiri" pitchFamily="2" charset="-78"/>
+                <a:ea typeface="Amiri" pitchFamily="2" charset="-78"/>
                 <a:cs typeface="Amiri" pitchFamily="2" charset="-78"/>
               </a:rPr>
               <a:t>لَوْ تَعَلَّمْتَ لُغَةً جَدِيدَةً، فَأَيُّهَا تَخْتَارُ؟</a:t>
@@ -7021,6 +7083,7 @@
                   <a:srgbClr val="D4AF37"/>
                 </a:solidFill>
                 <a:latin typeface="Amiri" pitchFamily="2" charset="-78"/>
+                <a:ea typeface="Amiri" pitchFamily="2" charset="-78"/>
                 <a:cs typeface="Amiri" pitchFamily="2" charset="-78"/>
               </a:rPr>
               <a:t>م</a:t>
@@ -7341,6 +7404,7 @@
                   <a:srgbClr val="8A6D1E"/>
                 </a:solidFill>
                 <a:latin typeface="Amiri" pitchFamily="2" charset="-78"/>
+                <a:ea typeface="Amiri" pitchFamily="2" charset="-78"/>
                 <a:cs typeface="Amiri" pitchFamily="2" charset="-78"/>
               </a:rPr>
               <a:t>وَرَقَةُ المُلَاحِظِ</a:t>
@@ -8811,6 +8875,7 @@
                   <a:srgbClr val="D4AF37"/>
                 </a:solidFill>
                 <a:latin typeface="Amiri" pitchFamily="2" charset="-78"/>
+                <a:ea typeface="Amiri" pitchFamily="2" charset="-78"/>
                 <a:cs typeface="Amiri" pitchFamily="2" charset="-78"/>
               </a:rPr>
               <a:t>م</a:t>
@@ -9131,6 +9196,7 @@
                   <a:srgbClr val="8A6D1E"/>
                 </a:solidFill>
                 <a:latin typeface="Amiri" pitchFamily="2" charset="-78"/>
+                <a:ea typeface="Amiri" pitchFamily="2" charset="-78"/>
                 <a:cs typeface="Amiri" pitchFamily="2" charset="-78"/>
               </a:rPr>
               <a:t>نَمُوذَجُ الإِجَابَةِ</a:t>
@@ -9373,6 +9439,7 @@
                   <a:srgbClr val="1B3B6F"/>
                 </a:solidFill>
                 <a:latin typeface="Amiri" pitchFamily="2" charset="-78"/>
+                <a:ea typeface="Amiri" pitchFamily="2" charset="-78"/>
                 <a:cs typeface="Amiri" pitchFamily="2" charset="-78"/>
               </a:rPr>
               <a:t>أُرِيدُ عَصِيرَ بُرْتُقَالٍ، مِنْ فَضْلِكَ.</a:t>
@@ -9449,6 +9516,7 @@
                   <a:srgbClr val="1B3B6F"/>
                 </a:solidFill>
                 <a:latin typeface="Amiri" pitchFamily="2" charset="-78"/>
+                <a:ea typeface="Amiri" pitchFamily="2" charset="-78"/>
                 <a:cs typeface="Amiri" pitchFamily="2" charset="-78"/>
               </a:rPr>
               <a:t>أَهْلًا وَسَهْلًا! مَاذَا تَشْرَبُ؟</a:t>
@@ -9552,6 +9620,7 @@
                   <a:srgbClr val="1B3B6F"/>
                 </a:solidFill>
                 <a:latin typeface="Amiri" pitchFamily="2" charset="-78"/>
+                <a:ea typeface="Amiri" pitchFamily="2" charset="-78"/>
                 <a:cs typeface="Amiri" pitchFamily="2" charset="-78"/>
               </a:rPr>
               <a:t>بِدُونِ سُكَّرٍ، وَمَعَ ثَلْجٍ.</a:t>
@@ -9628,6 +9697,7 @@
                   <a:srgbClr val="1B3B6F"/>
                 </a:solidFill>
                 <a:latin typeface="Amiri" pitchFamily="2" charset="-78"/>
+                <a:ea typeface="Amiri" pitchFamily="2" charset="-78"/>
                 <a:cs typeface="Amiri" pitchFamily="2" charset="-78"/>
               </a:rPr>
               <a:t>بِسُكَّرٍ أَمْ بِدُونِ سُكَّرٍ؟</a:t>
@@ -9731,6 +9801,7 @@
                   <a:srgbClr val="1B3B6F"/>
                 </a:solidFill>
                 <a:latin typeface="Amiri" pitchFamily="2" charset="-78"/>
+                <a:ea typeface="Amiri" pitchFamily="2" charset="-78"/>
                 <a:cs typeface="Amiri" pitchFamily="2" charset="-78"/>
               </a:rPr>
               <a:t>سَآكُلُ فَطِيرَةً بِالجُبْنِ.</a:t>
@@ -9807,6 +9878,7 @@
                   <a:srgbClr val="1B3B6F"/>
                 </a:solidFill>
                 <a:latin typeface="Amiri" pitchFamily="2" charset="-78"/>
+                <a:ea typeface="Amiri" pitchFamily="2" charset="-78"/>
                 <a:cs typeface="Amiri" pitchFamily="2" charset="-78"/>
               </a:rPr>
               <a:t>وَمَاذَا تَأْكُلُ؟</a:t>
@@ -9910,6 +9982,7 @@
                   <a:srgbClr val="1B3B6F"/>
                 </a:solidFill>
                 <a:latin typeface="Amiri" pitchFamily="2" charset="-78"/>
+                <a:ea typeface="Amiri" pitchFamily="2" charset="-78"/>
                 <a:cs typeface="Amiri" pitchFamily="2" charset="-78"/>
               </a:rPr>
               <a:t>كَمِ الحِسَابُ، مِنْ فَضْلِكَ؟</a:t>
@@ -9986,6 +10059,7 @@
                   <a:srgbClr val="1B3B6F"/>
                 </a:solidFill>
                 <a:latin typeface="Amiri" pitchFamily="2" charset="-78"/>
+                <a:ea typeface="Amiri" pitchFamily="2" charset="-78"/>
                 <a:cs typeface="Amiri" pitchFamily="2" charset="-78"/>
               </a:rPr>
               <a:t>حَاضِرٌ.</a:t>
@@ -10089,6 +10163,7 @@
                   <a:srgbClr val="1B3B6F"/>
                 </a:solidFill>
                 <a:latin typeface="Amiri" pitchFamily="2" charset="-78"/>
+                <a:ea typeface="Amiri" pitchFamily="2" charset="-78"/>
                 <a:cs typeface="Amiri" pitchFamily="2" charset="-78"/>
               </a:rPr>
               <a:t>نَعَمْ، أُحِبُّ المَنْسَفَ كَثِيرًا، لِأَنَّهُ لَذِيذٌ وَغَنِيٌّ.</a:t>
@@ -10165,6 +10240,7 @@
                   <a:srgbClr val="1B3B6F"/>
                 </a:solidFill>
                 <a:latin typeface="Amiri" pitchFamily="2" charset="-78"/>
+                <a:ea typeface="Amiri" pitchFamily="2" charset="-78"/>
                 <a:cs typeface="Amiri" pitchFamily="2" charset="-78"/>
               </a:rPr>
               <a:t>ثَلَاثَةُ دَنَانِيرَ. هَلْ تُحِبُّ الطَّعَامَ الأُرْدُنِّيَّ؟</a:t>
@@ -10374,6 +10450,7 @@
                   <a:srgbClr val="D4AF37"/>
                 </a:solidFill>
                 <a:latin typeface="Amiri" pitchFamily="2" charset="-78"/>
+                <a:ea typeface="Amiri" pitchFamily="2" charset="-78"/>
                 <a:cs typeface="Amiri" pitchFamily="2" charset="-78"/>
               </a:rPr>
               <a:t>م</a:t>
@@ -10694,6 +10771,7 @@
                   <a:srgbClr val="8A6D1E"/>
                 </a:solidFill>
                 <a:latin typeface="Amiri" pitchFamily="2" charset="-78"/>
+                <a:ea typeface="Amiri" pitchFamily="2" charset="-78"/>
                 <a:cs typeface="Amiri" pitchFamily="2" charset="-78"/>
               </a:rPr>
               <a:t>نَمُوذَجُ الإِجَابَةِ</a:t>
@@ -10936,6 +11014,7 @@
                   <a:srgbClr val="1B3B6F"/>
                 </a:solidFill>
                 <a:latin typeface="Amiri" pitchFamily="2" charset="-78"/>
+                <a:ea typeface="Amiri" pitchFamily="2" charset="-78"/>
                 <a:cs typeface="Amiri" pitchFamily="2" charset="-78"/>
               </a:rPr>
               <a:t>عِنْدِي صُدَاعٌ شَدِيدٌ وَحُمَّى خَفِيفَةٌ.</a:t>
@@ -11012,6 +11091,7 @@
                   <a:srgbClr val="1B3B6F"/>
                 </a:solidFill>
                 <a:latin typeface="Amiri" pitchFamily="2" charset="-78"/>
+                <a:ea typeface="Amiri" pitchFamily="2" charset="-78"/>
                 <a:cs typeface="Amiri" pitchFamily="2" charset="-78"/>
               </a:rPr>
               <a:t>مَسَاءَ الخَيْرِ، مَا المُشْكِلَةُ؟</a:t>
@@ -11115,6 +11195,7 @@
                   <a:srgbClr val="1B3B6F"/>
                 </a:solidFill>
                 <a:latin typeface="Amiri" pitchFamily="2" charset="-78"/>
+                <a:ea typeface="Amiri" pitchFamily="2" charset="-78"/>
                 <a:cs typeface="Amiri" pitchFamily="2" charset="-78"/>
               </a:rPr>
               <a:t>مُنْذُ أَمْسِ فِي المَسَاءِ.</a:t>
@@ -11191,6 +11272,7 @@
                   <a:srgbClr val="1B3B6F"/>
                 </a:solidFill>
                 <a:latin typeface="Amiri" pitchFamily="2" charset="-78"/>
+                <a:ea typeface="Amiri" pitchFamily="2" charset="-78"/>
                 <a:cs typeface="Amiri" pitchFamily="2" charset="-78"/>
               </a:rPr>
               <a:t>مُنْذُ مَتَى؟</a:t>
@@ -11294,6 +11376,7 @@
                   <a:srgbClr val="1B3B6F"/>
                 </a:solidFill>
                 <a:latin typeface="Amiri" pitchFamily="2" charset="-78"/>
+                <a:ea typeface="Amiri" pitchFamily="2" charset="-78"/>
                 <a:cs typeface="Amiri" pitchFamily="2" charset="-78"/>
               </a:rPr>
               <a:t>أَكَلْتُ سَمَكًا فِي مَطْعَمٍ عَلَى الشَّاطِئِ، ثُمَّ جَلَسْتُ فِي الشَّمْسِ سَاعَتَيْنِ.</a:t>
@@ -11370,6 +11453,7 @@
                   <a:srgbClr val="1B3B6F"/>
                 </a:solidFill>
                 <a:latin typeface="Amiri" pitchFamily="2" charset="-78"/>
+                <a:ea typeface="Amiri" pitchFamily="2" charset="-78"/>
                 <a:cs typeface="Amiri" pitchFamily="2" charset="-78"/>
               </a:rPr>
               <a:t>مَاذَا أَكَلْتَ أَمْسِ؟</a:t>
@@ -11473,6 +11557,7 @@
                   <a:srgbClr val="1B3B6F"/>
                 </a:solidFill>
                 <a:latin typeface="Amiri" pitchFamily="2" charset="-78"/>
+                <a:ea typeface="Amiri" pitchFamily="2" charset="-78"/>
                 <a:cs typeface="Amiri" pitchFamily="2" charset="-78"/>
               </a:rPr>
               <a:t>كَمْ مَرَّةً آخُذُهَا فِي اليَوْمِ؟ وَهَلْ آخُذُهَا قَبْلَ الأَكْلِ أَمْ بَعْدَهُ؟</a:t>
@@ -11549,6 +11634,7 @@
                   <a:srgbClr val="1B3B6F"/>
                 </a:solidFill>
                 <a:latin typeface="Amiri" pitchFamily="2" charset="-78"/>
+                <a:ea typeface="Amiri" pitchFamily="2" charset="-78"/>
                 <a:cs typeface="Amiri" pitchFamily="2" charset="-78"/>
               </a:rPr>
               <a:t>خُذْ هٰذِهِ الأَقْرَاصَ.</a:t>
@@ -11652,6 +11738,7 @@
                   <a:srgbClr val="1B3B6F"/>
                 </a:solidFill>
                 <a:latin typeface="Amiri" pitchFamily="2" charset="-78"/>
+                <a:ea typeface="Amiri" pitchFamily="2" charset="-78"/>
                 <a:cs typeface="Amiri" pitchFamily="2" charset="-78"/>
               </a:rPr>
               <a:t>سَأَبْقَى فِي الفُنْدُقِ وَأَشْرَبُ مَاءً كَثِيرًا، لِأَنِّي أُرِيدُ أَنْ أَكُونَ بِخَيْرٍ قَبْلَ رِحْلَةِ البَتْرَاءِ.</a:t>
@@ -11728,6 +11815,7 @@
                   <a:srgbClr val="1B3B6F"/>
                 </a:solidFill>
                 <a:latin typeface="Amiri" pitchFamily="2" charset="-78"/>
+                <a:ea typeface="Amiri" pitchFamily="2" charset="-78"/>
                 <a:cs typeface="Amiri" pitchFamily="2" charset="-78"/>
               </a:rPr>
               <a:t>مَرَّتَيْنِ بَعْدَ الأَكْلِ. وَمَاذَا سَتَفْعَلُ غَدًا؟</a:t>
@@ -11937,6 +12025,7 @@
                   <a:srgbClr val="D4AF37"/>
                 </a:solidFill>
                 <a:latin typeface="Amiri" pitchFamily="2" charset="-78"/>
+                <a:ea typeface="Amiri" pitchFamily="2" charset="-78"/>
                 <a:cs typeface="Amiri" pitchFamily="2" charset="-78"/>
               </a:rPr>
               <a:t>م</a:t>
@@ -12257,6 +12346,7 @@
                   <a:srgbClr val="8A6D1E"/>
                 </a:solidFill>
                 <a:latin typeface="Amiri" pitchFamily="2" charset="-78"/>
+                <a:ea typeface="Amiri" pitchFamily="2" charset="-78"/>
                 <a:cs typeface="Amiri" pitchFamily="2" charset="-78"/>
               </a:rPr>
               <a:t>نَمُوذَجُ الإِجَابَةِ</a:t>
@@ -12499,6 +12589,7 @@
                   <a:srgbClr val="1B3B6F"/>
                 </a:solidFill>
                 <a:latin typeface="Amiri" pitchFamily="2" charset="-78"/>
+                <a:ea typeface="Amiri" pitchFamily="2" charset="-78"/>
                 <a:cs typeface="Amiri" pitchFamily="2" charset="-78"/>
               </a:rPr>
               <a:t>لِأَنِّي أُحِبُّ القِرَاءَةَ مُنْذُ طُفُولَتِي، وَأَيْضًا لِأَنَّ المَكْتَبَةَ قَرِيبَةٌ مِنْ بَيْتِي، فَأَسْتَطِيعُ أَنْ آتِيَ مَشْيًا.</a:t>
@@ -12575,6 +12666,7 @@
                   <a:srgbClr val="1B3B6F"/>
                 </a:solidFill>
                 <a:latin typeface="Amiri" pitchFamily="2" charset="-78"/>
+                <a:ea typeface="Amiri" pitchFamily="2" charset="-78"/>
                 <a:cs typeface="Amiri" pitchFamily="2" charset="-78"/>
               </a:rPr>
               <a:t>لِمَاذَا تُرِيدُ أَنْ تَعْمَلَ فِي مَكْتَبَتِنَا؟</a:t>
@@ -12678,6 +12770,7 @@
                   <a:srgbClr val="1B3B6F"/>
                 </a:solidFill>
                 <a:latin typeface="Amiri" pitchFamily="2" charset="-78"/>
+                <a:ea typeface="Amiri" pitchFamily="2" charset="-78"/>
                 <a:cs typeface="Amiri" pitchFamily="2" charset="-78"/>
               </a:rPr>
               <a:t>أُجِيدُ اسْتِخْدَامَ الحَاسُوبِ، وَأَتَكَلَّمُ العَرَبِيَّةَ وَالإِنْجِلِيزِيَّةَ؛ مَثَلًا، أُسَاعِدُ أَبِي فِي الرَّدِّ عَلَى رَسَائِلِ زَبَائِنِهِ.</a:t>
@@ -12754,6 +12847,7 @@
                   <a:srgbClr val="1B3B6F"/>
                 </a:solidFill>
                 <a:latin typeface="Amiri" pitchFamily="2" charset="-78"/>
+                <a:ea typeface="Amiri" pitchFamily="2" charset="-78"/>
                 <a:cs typeface="Amiri" pitchFamily="2" charset="-78"/>
               </a:rPr>
               <a:t>مَا مَهَارَاتُكَ؟</a:t>
@@ -12857,6 +12951,7 @@
                   <a:srgbClr val="1B3B6F"/>
                 </a:solidFill>
                 <a:latin typeface="Amiri" pitchFamily="2" charset="-78"/>
+                <a:ea typeface="Amiri" pitchFamily="2" charset="-78"/>
                 <a:cs typeface="Amiri" pitchFamily="2" charset="-78"/>
               </a:rPr>
               <a:t>نَعَمْ، فِي الصَّيْفِ المَاضِي عَمِلْتُ أُسْبُوعَيْنِ فِي مَكْتَبٍ، فَتَعَلَّمْتُ أَنْ أَكُونَ دَقِيقًا وَأَنْ أَحْتَرِمَ المَوَاعِيدَ.</a:t>
@@ -12933,6 +13028,7 @@
                   <a:srgbClr val="1B3B6F"/>
                 </a:solidFill>
                 <a:latin typeface="Amiri" pitchFamily="2" charset="-78"/>
+                <a:ea typeface="Amiri" pitchFamily="2" charset="-78"/>
                 <a:cs typeface="Amiri" pitchFamily="2" charset="-78"/>
               </a:rPr>
               <a:t>هَلْ عَمِلْتَ مِنْ قَبْلُ؟</a:t>
@@ -13036,6 +13132,7 @@
                   <a:srgbClr val="1B3B6F"/>
                 </a:solidFill>
                 <a:latin typeface="Amiri" pitchFamily="2" charset="-78"/>
+                <a:ea typeface="Amiri" pitchFamily="2" charset="-78"/>
                 <a:cs typeface="Amiri" pitchFamily="2" charset="-78"/>
               </a:rPr>
               <a:t>نَعَمْ، يُنَاسِبُنِي تَمَامًا، أَمَّا يَوْمُ الأَحَدِ فَأُخَصِّصُهُ لِلْمُرَاجَعَةِ وَلِعَائِلَتِي.</a:t>
@@ -13112,6 +13209,7 @@
                   <a:srgbClr val="1B3B6F"/>
                 </a:solidFill>
                 <a:latin typeface="Amiri" pitchFamily="2" charset="-78"/>
+                <a:ea typeface="Amiri" pitchFamily="2" charset="-78"/>
                 <a:cs typeface="Amiri" pitchFamily="2" charset="-78"/>
               </a:rPr>
               <a:t>هٰذَا العَمَلُ يَوْمَ السَّبْتِ فَقَطْ. هَلْ يُنَاسِبُكَ؟</a:t>
@@ -13215,6 +13313,7 @@
                   <a:srgbClr val="1B3B6F"/>
                 </a:solidFill>
                 <a:latin typeface="Amiri" pitchFamily="2" charset="-78"/>
+                <a:ea typeface="Amiri" pitchFamily="2" charset="-78"/>
                 <a:cs typeface="Amiri" pitchFamily="2" charset="-78"/>
               </a:rPr>
               <a:t>سَأُوَفِّرُ نِصْفَهُ لِكَيْ أُسَافِرَ إِلَى المَغْرِبِ بَعْدَ الامْتِحَانَاتِ، وَسَأَشْتَرِي بِالبَاقِي كُتُبًا.</a:t>
@@ -13291,6 +13390,7 @@
                   <a:srgbClr val="1B3B6F"/>
                 </a:solidFill>
                 <a:latin typeface="Amiri" pitchFamily="2" charset="-78"/>
+                <a:ea typeface="Amiri" pitchFamily="2" charset="-78"/>
                 <a:cs typeface="Amiri" pitchFamily="2" charset="-78"/>
               </a:rPr>
               <a:t>وَكَيْفَ سَتَصْرِفُ رَاتِبَكَ؟</a:t>
@@ -13500,6 +13600,7 @@
                   <a:srgbClr val="D4AF37"/>
                 </a:solidFill>
                 <a:latin typeface="Amiri" pitchFamily="2" charset="-78"/>
+                <a:ea typeface="Amiri" pitchFamily="2" charset="-78"/>
                 <a:cs typeface="Amiri" pitchFamily="2" charset="-78"/>
               </a:rPr>
               <a:t>م</a:t>
@@ -13820,6 +13921,7 @@
                   <a:srgbClr val="8A6D1E"/>
                 </a:solidFill>
                 <a:latin typeface="Amiri" pitchFamily="2" charset="-78"/>
+                <a:ea typeface="Amiri" pitchFamily="2" charset="-78"/>
                 <a:cs typeface="Amiri" pitchFamily="2" charset="-78"/>
               </a:rPr>
               <a:t>نَمُوذَجُ الإِجَابَةِ</a:t>
@@ -14062,6 +14164,7 @@
                   <a:srgbClr val="1B3B6F"/>
                 </a:solidFill>
                 <a:latin typeface="Amiri" pitchFamily="2" charset="-78"/>
+                <a:ea typeface="Amiri" pitchFamily="2" charset="-78"/>
                 <a:cs typeface="Amiri" pitchFamily="2" charset="-78"/>
               </a:rPr>
               <a:t>فِي رَأْيِي، نَعَمْ، لِأَنَّ اللُّغَةَ تَفْتَحُ أَبْوَابَ العَمَلِ وَالدِّرَاسَةِ فِي الخَارِجِ، وَلِأَنَّهَا تُعَلِّمُنَا كَيْفَ يُفَكِّرُ الآخَرُونَ.</a:t>
@@ -14138,6 +14241,7 @@
                   <a:srgbClr val="1B3B6F"/>
                 </a:solidFill>
                 <a:latin typeface="Amiri" pitchFamily="2" charset="-78"/>
+                <a:ea typeface="Amiri" pitchFamily="2" charset="-78"/>
                 <a:cs typeface="Amiri" pitchFamily="2" charset="-78"/>
               </a:rPr>
               <a:t>هَلْ يَجِبُ أَنْ تَكُونَ اللُّغَاتُ إِلْزَامِيَّةً؟</a:t>
@@ -14241,6 +14345,7 @@
                   <a:srgbClr val="1B3B6F"/>
                 </a:solidFill>
                 <a:latin typeface="Amiri" pitchFamily="2" charset="-78"/>
+                <a:ea typeface="Amiri" pitchFamily="2" charset="-78"/>
                 <a:cs typeface="Amiri" pitchFamily="2" charset="-78"/>
               </a:rPr>
               <a:t>عِنْدَمَا زُرْتُ الأُرْدُنَّ، اسْتَطَعْتُ أَنْ أَتَكَلَّمَ مَعَ بَائِعٍ فِي السُّوقِ بِالعَرَبِيَّةِ، مِمَّا جَعَلَهُ يَدْعُونَا إِلَى الشَّايِ فِي بَيْتِهِ.</a:t>
@@ -14317,6 +14422,7 @@
                   <a:srgbClr val="1B3B6F"/>
                 </a:solidFill>
                 <a:latin typeface="Amiri" pitchFamily="2" charset="-78"/>
+                <a:ea typeface="Amiri" pitchFamily="2" charset="-78"/>
                 <a:cs typeface="Amiri" pitchFamily="2" charset="-78"/>
               </a:rPr>
               <a:t>أَعْطِنَا مِثَالًا مِنْ حَيَاتِكَ.</a:t>
@@ -14420,6 +14526,7 @@
                   <a:srgbClr val="1B3B6F"/>
                 </a:solidFill>
                 <a:latin typeface="Amiri" pitchFamily="2" charset="-78"/>
+                <a:ea typeface="Amiri" pitchFamily="2" charset="-78"/>
                 <a:cs typeface="Amiri" pitchFamily="2" charset="-78"/>
               </a:rPr>
               <a:t>صَحِيحٌ أَنَّ الإِنْجِلِيزِيَّةَ يُتَكَلَّمُ بِهَا فِي كُلِّ مَكَانٍ، غَيْرَ أَنَّ النَّاسَ يَفْتَحُونَ قُلُوبَهُمْ لِمَنْ يُكَلِّمُهُمْ بِلُغَتِهِمْ.</a:t>
@@ -14496,6 +14603,7 @@
                   <a:srgbClr val="1B3B6F"/>
                 </a:solidFill>
                 <a:latin typeface="Amiri" pitchFamily="2" charset="-78"/>
+                <a:ea typeface="Amiri" pitchFamily="2" charset="-78"/>
                 <a:cs typeface="Amiri" pitchFamily="2" charset="-78"/>
               </a:rPr>
               <a:t>لٰكِنَّ الإِنْجِلِيزِيَّةَ تَكْفِي، أَلَيْسَ كَذٰلِكَ؟</a:t>
@@ -14599,6 +14707,7 @@
                   <a:srgbClr val="1B3B6F"/>
                 </a:solidFill>
                 <a:latin typeface="Amiri" pitchFamily="2" charset="-78"/>
+                <a:ea typeface="Amiri" pitchFamily="2" charset="-78"/>
                 <a:cs typeface="Amiri" pitchFamily="2" charset="-78"/>
               </a:rPr>
               <a:t>يَجِبُ أَنْ تُدَرَّسَ اللُّغَاتُ مِنَ المَرْحَلَةِ الابْتِدَائِيَّةِ، وَأَنْ تُنَظَّمَ رِحْلَاتُ تَبَادُلٍ، لِأَنَّ الطَّالِبَ يَتَعَلَّمُ أَسْرَعَ عِنْدَمَا يَحْتَاجُ إِلَى اللُّغَةِ.</a:t>
@@ -14675,6 +14784,7 @@
                   <a:srgbClr val="1B3B6F"/>
                 </a:solidFill>
                 <a:latin typeface="Amiri" pitchFamily="2" charset="-78"/>
+                <a:ea typeface="Amiri" pitchFamily="2" charset="-78"/>
                 <a:cs typeface="Amiri" pitchFamily="2" charset="-78"/>
               </a:rPr>
               <a:t>كَيْفَ نُشَجِّعُ الطُّلَّابَ؟</a:t>
@@ -14778,6 +14888,7 @@
                   <a:srgbClr val="1B3B6F"/>
                 </a:solidFill>
                 <a:latin typeface="Amiri" pitchFamily="2" charset="-78"/>
+                <a:ea typeface="Amiri" pitchFamily="2" charset="-78"/>
                 <a:cs typeface="Amiri" pitchFamily="2" charset="-78"/>
               </a:rPr>
               <a:t>لَوْ تَعَلَّمْتُ لُغَةً جَدِيدَةً، لَاخْتَرْتُ التُّرْكِيَّةَ، لِأَنَّ فِيهَا كَلِمَاتٍ عَرَبِيَّةً كَثِيرَةً، وَلَزُرْتُ إِسْطَنْبُولَ لِأُمَارِسَهَا.</a:t>
@@ -14854,6 +14965,7 @@
                   <a:srgbClr val="1B3B6F"/>
                 </a:solidFill>
                 <a:latin typeface="Amiri" pitchFamily="2" charset="-78"/>
+                <a:ea typeface="Amiri" pitchFamily="2" charset="-78"/>
                 <a:cs typeface="Amiri" pitchFamily="2" charset="-78"/>
               </a:rPr>
               <a:t>لَوْ تَعَلَّمْتَ لُغَةً جَدِيدَةً، فَأَيُّهَا تَخْتَارُ؟</a:t>
@@ -15063,6 +15175,7 @@
                   <a:srgbClr val="D4AF37"/>
                 </a:solidFill>
                 <a:latin typeface="Amiri" pitchFamily="2" charset="-78"/>
+                <a:ea typeface="Amiri" pitchFamily="2" charset="-78"/>
                 <a:cs typeface="Amiri" pitchFamily="2" charset="-78"/>
               </a:rPr>
               <a:t>م</a:t>
@@ -15383,6 +15496,7 @@
                   <a:srgbClr val="8A6D1E"/>
                 </a:solidFill>
                 <a:latin typeface="Amiri" pitchFamily="2" charset="-78"/>
+                <a:ea typeface="Amiri" pitchFamily="2" charset="-78"/>
                 <a:cs typeface="Amiri" pitchFamily="2" charset="-78"/>
               </a:rPr>
               <a:t>أَسْئِلَةٌ مِنْ كُلِّ المَحَاوِرِ</a:t>
@@ -15663,6 +15777,7 @@
                   <a:srgbClr val="1B3B6F"/>
                 </a:solidFill>
                 <a:latin typeface="Amiri" pitchFamily="2" charset="-78"/>
+                <a:ea typeface="Amiri" pitchFamily="2" charset="-78"/>
                 <a:cs typeface="Amiri" pitchFamily="2" charset="-78"/>
               </a:rPr>
               <a:t>وَجْبَتِي المُفَضَّلَةُ …</a:t>
@@ -15739,6 +15854,7 @@
                   <a:srgbClr val="5A6472"/>
                 </a:solidFill>
                 <a:latin typeface="Amiri" pitchFamily="2" charset="-78"/>
+                <a:ea typeface="Amiri" pitchFamily="2" charset="-78"/>
                 <a:cs typeface="Amiri" pitchFamily="2" charset="-78"/>
               </a:rPr>
               <a:t>مَا وَجْبَتُكَ المُفَضَّلَةُ؟</a:t>
@@ -15920,6 +16036,7 @@
                   <a:srgbClr val="1B3B6F"/>
                 </a:solidFill>
                 <a:latin typeface="Amiri" pitchFamily="2" charset="-78"/>
+                <a:ea typeface="Amiri" pitchFamily="2" charset="-78"/>
                 <a:cs typeface="Amiri" pitchFamily="2" charset="-78"/>
               </a:rPr>
               <a:t>فِي وَقْتِ الفَرَاغِ …</a:t>
@@ -15996,6 +16113,7 @@
                   <a:srgbClr val="5A6472"/>
                 </a:solidFill>
                 <a:latin typeface="Amiri" pitchFamily="2" charset="-78"/>
+                <a:ea typeface="Amiri" pitchFamily="2" charset="-78"/>
                 <a:cs typeface="Amiri" pitchFamily="2" charset="-78"/>
               </a:rPr>
               <a:t>مَاذَا تَفْعَلُ فِي وَقْتِ الفَرَاغِ؟</a:t>
@@ -16177,6 +16295,7 @@
                   <a:srgbClr val="1B3B6F"/>
                 </a:solidFill>
                 <a:latin typeface="Amiri" pitchFamily="2" charset="-78"/>
+                <a:ea typeface="Amiri" pitchFamily="2" charset="-78"/>
                 <a:cs typeface="Amiri" pitchFamily="2" charset="-78"/>
               </a:rPr>
               <a:t>بَيْتِي … ، فِيهِ …</a:t>
@@ -16253,6 +16372,7 @@
                   <a:srgbClr val="5A6472"/>
                 </a:solidFill>
                 <a:latin typeface="Amiri" pitchFamily="2" charset="-78"/>
+                <a:ea typeface="Amiri" pitchFamily="2" charset="-78"/>
                 <a:cs typeface="Amiri" pitchFamily="2" charset="-78"/>
               </a:rPr>
               <a:t>صِفْ بَيْتَكَ</a:t>
@@ -16434,6 +16554,7 @@
                   <a:srgbClr val="1B3B6F"/>
                 </a:solidFill>
                 <a:latin typeface="Amiri" pitchFamily="2" charset="-78"/>
+                <a:ea typeface="Amiri" pitchFamily="2" charset="-78"/>
                 <a:cs typeface="Amiri" pitchFamily="2" charset="-78"/>
               </a:rPr>
               <a:t>مَادَّتِي المُفَضَّلَةُ … لِأَنَّ …</a:t>
@@ -16510,6 +16631,7 @@
                   <a:srgbClr val="5A6472"/>
                 </a:solidFill>
                 <a:latin typeface="Amiri" pitchFamily="2" charset="-78"/>
+                <a:ea typeface="Amiri" pitchFamily="2" charset="-78"/>
                 <a:cs typeface="Amiri" pitchFamily="2" charset="-78"/>
               </a:rPr>
               <a:t>مَا مَادَّتُكَ المُفَضَّلَةُ؟</a:t>
@@ -16691,6 +16813,7 @@
                   <a:srgbClr val="1B3B6F"/>
                 </a:solidFill>
                 <a:latin typeface="Amiri" pitchFamily="2" charset="-78"/>
+                <a:ea typeface="Amiri" pitchFamily="2" charset="-78"/>
                 <a:cs typeface="Amiri" pitchFamily="2" charset="-78"/>
               </a:rPr>
               <a:t>قَضَيْتُ عُطْلَتِي فِي …</a:t>
@@ -16767,6 +16890,7 @@
                   <a:srgbClr val="5A6472"/>
                 </a:solidFill>
                 <a:latin typeface="Amiri" pitchFamily="2" charset="-78"/>
+                <a:ea typeface="Amiri" pitchFamily="2" charset="-78"/>
                 <a:cs typeface="Amiri" pitchFamily="2" charset="-78"/>
               </a:rPr>
               <a:t>أَيْنَ قَضَيْتَ عُطْلَتَكَ الأَخِيرَةَ؟</a:t>
@@ -16934,6 +17058,7 @@
                   <a:srgbClr val="1B3B6F"/>
                 </a:solidFill>
                 <a:latin typeface="Amiri" pitchFamily="2" charset="-78"/>
+                <a:ea typeface="Amiri" pitchFamily="2" charset="-78"/>
                 <a:cs typeface="Amiri" pitchFamily="2" charset="-78"/>
               </a:rPr>
               <a:t>عَفْوًا، لَمْ أَفْهَمْ</a:t>
@@ -16960,6 +17085,7 @@
                   <a:srgbClr val="1B3B6F"/>
                 </a:solidFill>
                 <a:latin typeface="Amiri" pitchFamily="2" charset="-78"/>
+                <a:ea typeface="Amiri" pitchFamily="2" charset="-78"/>
                 <a:cs typeface="Amiri" pitchFamily="2" charset="-78"/>
               </a:rPr>
               <a:t>هَلْ يُمْكِنُ أَنْ تُعِيدَ السُّؤَالَ؟</a:t>
@@ -17093,6 +17219,7 @@
                   <a:srgbClr val="D4AF37"/>
                 </a:solidFill>
                 <a:latin typeface="Amiri" pitchFamily="2" charset="-78"/>
+                <a:ea typeface="Amiri" pitchFamily="2" charset="-78"/>
                 <a:cs typeface="Amiri" pitchFamily="2" charset="-78"/>
               </a:rPr>
               <a:t>م</a:t>
@@ -17413,6 +17540,7 @@
                   <a:srgbClr val="8A6D1E"/>
                 </a:solidFill>
                 <a:latin typeface="Amiri" pitchFamily="2" charset="-78"/>
+                <a:ea typeface="Amiri" pitchFamily="2" charset="-78"/>
                 <a:cs typeface="Amiri" pitchFamily="2" charset="-78"/>
               </a:rPr>
               <a:t>تَطْوِيرُ الإِجَابَةِ</a:t>
@@ -17693,6 +17821,7 @@
                   <a:srgbClr val="1B3B6F"/>
                 </a:solidFill>
                 <a:latin typeface="Amiri" pitchFamily="2" charset="-78"/>
+                <a:ea typeface="Amiri" pitchFamily="2" charset="-78"/>
                 <a:cs typeface="Amiri" pitchFamily="2" charset="-78"/>
               </a:rPr>
               <a:t>أُحَاوِلُ أَنْ … لٰكِنَّ … وَمِنَ الآنَ سَأُقَلِّلُ …</a:t>
@@ -17769,6 +17898,7 @@
                   <a:srgbClr val="5A6472"/>
                 </a:solidFill>
                 <a:latin typeface="Amiri" pitchFamily="2" charset="-78"/>
+                <a:ea typeface="Amiri" pitchFamily="2" charset="-78"/>
                 <a:cs typeface="Amiri" pitchFamily="2" charset="-78"/>
               </a:rPr>
               <a:t>هَلْ تَأْكُلُ بِطَرِيقَةٍ صِحِّيَّةٍ؟</a:t>
@@ -17885,6 +18015,7 @@
                   <a:srgbClr val="1B3B6F"/>
                 </a:solidFill>
                 <a:latin typeface="Amiri" pitchFamily="2" charset="-78"/>
+                <a:ea typeface="Amiri" pitchFamily="2" charset="-78"/>
                 <a:cs typeface="Amiri" pitchFamily="2" charset="-78"/>
               </a:rPr>
               <a:t>نُصَلِّي … ثُمَّ نَزُورُ … ؛ وَفِي العِيدِ المَاضِي …</a:t>
@@ -17961,6 +18092,7 @@
                   <a:srgbClr val="5A6472"/>
                 </a:solidFill>
                 <a:latin typeface="Amiri" pitchFamily="2" charset="-78"/>
+                <a:ea typeface="Amiri" pitchFamily="2" charset="-78"/>
                 <a:cs typeface="Amiri" pitchFamily="2" charset="-78"/>
               </a:rPr>
               <a:t>كَيْفَ تَحْتَفِلُ عَائِلَتُكَ بِالعِيدِ؟</a:t>
@@ -18077,6 +18209,7 @@
                   <a:srgbClr val="1B3B6F"/>
                 </a:solidFill>
                 <a:latin typeface="Amiri" pitchFamily="2" charset="-78"/>
+                <a:ea typeface="Amiri" pitchFamily="2" charset="-78"/>
                 <a:cs typeface="Amiri" pitchFamily="2" charset="-78"/>
               </a:rPr>
               <a:t>نَعَمْ، لِأَنَّ … ، لٰكِنْ يَنْقُصُهَا …</a:t>
@@ -18153,6 +18286,7 @@
                   <a:srgbClr val="5A6472"/>
                 </a:solidFill>
                 <a:latin typeface="Amiri" pitchFamily="2" charset="-78"/>
+                <a:ea typeface="Amiri" pitchFamily="2" charset="-78"/>
                 <a:cs typeface="Amiri" pitchFamily="2" charset="-78"/>
               </a:rPr>
               <a:t>هَلْ تُحِبُّ مَدِينَتَكَ؟ لِمَاذَا؟</a:t>
@@ -18269,6 +18403,7 @@
                   <a:srgbClr val="1B3B6F"/>
                 </a:solidFill>
                 <a:latin typeface="Amiri" pitchFamily="2" charset="-78"/>
+                <a:ea typeface="Amiri" pitchFamily="2" charset="-78"/>
                 <a:cs typeface="Amiri" pitchFamily="2" charset="-78"/>
               </a:rPr>
               <a:t>سَأَرْتَاحُ … ثُمَّ … لِأَنِّي …</a:t>
@@ -18345,6 +18480,7 @@
                   <a:srgbClr val="5A6472"/>
                 </a:solidFill>
                 <a:latin typeface="Amiri" pitchFamily="2" charset="-78"/>
+                <a:ea typeface="Amiri" pitchFamily="2" charset="-78"/>
                 <a:cs typeface="Amiri" pitchFamily="2" charset="-78"/>
               </a:rPr>
               <a:t>مَاذَا سَتَفْعَلُ بَعْدَ الامْتِحَانَاتِ؟</a:t>
@@ -18461,6 +18597,7 @@
                   <a:srgbClr val="1B3B6F"/>
                 </a:solidFill>
                 <a:latin typeface="Amiri" pitchFamily="2" charset="-78"/>
+                <a:ea typeface="Amiri" pitchFamily="2" charset="-78"/>
                 <a:cs typeface="Amiri" pitchFamily="2" charset="-78"/>
               </a:rPr>
               <a:t>أَتَعَلَّمُهَا لِأَنَّ … ؛ وَعِنْدَمَا كُنْتُ صَغِيرًا …</a:t>
@@ -18537,6 +18674,7 @@
                   <a:srgbClr val="5A6472"/>
                 </a:solidFill>
                 <a:latin typeface="Amiri" pitchFamily="2" charset="-78"/>
+                <a:ea typeface="Amiri" pitchFamily="2" charset="-78"/>
                 <a:cs typeface="Amiri" pitchFamily="2" charset="-78"/>
               </a:rPr>
               <a:t>لِمَاذَا تَتَعَلَّمُ العَرَبِيَّةَ؟</a:t>
@@ -18759,6 +18897,7 @@
                   <a:srgbClr val="D4AF37"/>
                 </a:solidFill>
                 <a:latin typeface="Amiri" pitchFamily="2" charset="-78"/>
+                <a:ea typeface="Amiri" pitchFamily="2" charset="-78"/>
                 <a:cs typeface="Amiri" pitchFamily="2" charset="-78"/>
               </a:rPr>
               <a:t>م</a:t>
@@ -19079,6 +19218,7 @@
                   <a:srgbClr val="8A6D1E"/>
                 </a:solidFill>
                 <a:latin typeface="Amiri" pitchFamily="2" charset="-78"/>
+                <a:ea typeface="Amiri" pitchFamily="2" charset="-78"/>
                 <a:cs typeface="Amiri" pitchFamily="2" charset="-78"/>
               </a:rPr>
               <a:t>أَسْئِلَةُ التَّفْكِيرِ العَمِيقِ</a:t>
@@ -19359,6 +19499,7 @@
                   <a:srgbClr val="1B3B6F"/>
                 </a:solidFill>
                 <a:latin typeface="Amiri" pitchFamily="2" charset="-78"/>
+                <a:ea typeface="Amiri" pitchFamily="2" charset="-78"/>
                 <a:cs typeface="Amiri" pitchFamily="2" charset="-78"/>
               </a:rPr>
               <a:t>أَرَى أَنَّ … ؛ فَالأُسْرَةُ … بَيْنَمَا المَدْرَسَةُ …</a:t>
@@ -19435,6 +19576,7 @@
                   <a:srgbClr val="5A6472"/>
                 </a:solidFill>
                 <a:latin typeface="Amiri" pitchFamily="2" charset="-78"/>
+                <a:ea typeface="Amiri" pitchFamily="2" charset="-78"/>
                 <a:cs typeface="Amiri" pitchFamily="2" charset="-78"/>
               </a:rPr>
               <a:t>مَنِ المَسْؤُولُ عَنْ صِحَّةِ الشَّبَابِ</a:t>
@@ -19461,6 +19603,7 @@
                   <a:srgbClr val="5A6472"/>
                 </a:solidFill>
                 <a:latin typeface="Amiri" pitchFamily="2" charset="-78"/>
+                <a:ea typeface="Amiri" pitchFamily="2" charset="-78"/>
                 <a:cs typeface="Amiri" pitchFamily="2" charset="-78"/>
               </a:rPr>
               <a:t>الأُسْرَةُ أَمِ المَدْرَسَةُ؟</a:t>
@@ -19577,6 +19720,7 @@
                   <a:srgbClr val="1B3B6F"/>
                 </a:solidFill>
                 <a:latin typeface="Amiri" pitchFamily="2" charset="-78"/>
+                <a:ea typeface="Amiri" pitchFamily="2" charset="-78"/>
                 <a:cs typeface="Amiri" pitchFamily="2" charset="-78"/>
               </a:rPr>
               <a:t>صَحِيحٌ أَنَّ … غَيْرَ أَنَّ …</a:t>
@@ -19653,6 +19797,7 @@
                   <a:srgbClr val="5A6472"/>
                 </a:solidFill>
                 <a:latin typeface="Amiri" pitchFamily="2" charset="-78"/>
+                <a:ea typeface="Amiri" pitchFamily="2" charset="-78"/>
                 <a:cs typeface="Amiri" pitchFamily="2" charset="-78"/>
               </a:rPr>
               <a:t>هَلْ جَعَلَتِ التِّكْنُولُوجْيَا حَيَاتَنَا أَسْهَلَ؟</a:t>
@@ -19769,6 +19914,7 @@
                   <a:srgbClr val="1B3B6F"/>
                 </a:solidFill>
                 <a:latin typeface="Amiri" pitchFamily="2" charset="-78"/>
+                <a:ea typeface="Amiri" pitchFamily="2" charset="-78"/>
                 <a:cs typeface="Amiri" pitchFamily="2" charset="-78"/>
               </a:rPr>
               <a:t>فِي رَأْيِي … ، لِأَنَّ … مِمَّا …</a:t>
@@ -19845,6 +19991,7 @@
                   <a:srgbClr val="5A6472"/>
                 </a:solidFill>
                 <a:latin typeface="Amiri" pitchFamily="2" charset="-78"/>
+                <a:ea typeface="Amiri" pitchFamily="2" charset="-78"/>
                 <a:cs typeface="Amiri" pitchFamily="2" charset="-78"/>
               </a:rPr>
               <a:t>مَا الَّذِي يَجْعَلُ المَدِينَةَ مَكَانًا جَيِّدًا لِلْعَيْشِ؟</a:t>
@@ -19961,6 +20108,7 @@
                   <a:srgbClr val="1B3B6F"/>
                 </a:solidFill>
                 <a:latin typeface="Amiri" pitchFamily="2" charset="-78"/>
+                <a:ea typeface="Amiri" pitchFamily="2" charset="-78"/>
                 <a:cs typeface="Amiri" pitchFamily="2" charset="-78"/>
               </a:rPr>
               <a:t>مِنْ نَاحِيَةٍ … وَمِنْ نَاحِيَةٍ أُخْرَى …</a:t>
@@ -20037,6 +20185,7 @@
                   <a:srgbClr val="5A6472"/>
                 </a:solidFill>
                 <a:latin typeface="Amiri" pitchFamily="2" charset="-78"/>
+                <a:ea typeface="Amiri" pitchFamily="2" charset="-78"/>
                 <a:cs typeface="Amiri" pitchFamily="2" charset="-78"/>
               </a:rPr>
               <a:t>هَلِ العَمَلُ فِي الخَارِجِ فِكْرَةٌ جَيِّدَةٌ؟</a:t>
@@ -20153,6 +20302,7 @@
                   <a:srgbClr val="1B3B6F"/>
                 </a:solidFill>
                 <a:latin typeface="Amiri" pitchFamily="2" charset="-78"/>
+                <a:ea typeface="Amiri" pitchFamily="2" charset="-78"/>
                 <a:cs typeface="Amiri" pitchFamily="2" charset="-78"/>
               </a:rPr>
               <a:t>لَوْ عُدْتُ، لَبَدَأْتُ … وَلَقَرَأْتُ …</a:t>
@@ -20229,6 +20379,7 @@
                   <a:srgbClr val="1B3B6F"/>
                 </a:solidFill>
                 <a:latin typeface="Amiri" pitchFamily="2" charset="-78"/>
+                <a:ea typeface="Amiri" pitchFamily="2" charset="-78"/>
                 <a:cs typeface="Amiri" pitchFamily="2" charset="-78"/>
               </a:rPr>
               <a:t>لَوْ عُدْتَ إِلَى بِدَايَةِ الصَّفِّ العَاشِرِ، فَمَاذَا تُغَيِّرُ؟</a:t>
@@ -20438,6 +20589,7 @@
                   <a:srgbClr val="D4AF37"/>
                 </a:solidFill>
                 <a:latin typeface="Amiri" pitchFamily="2" charset="-78"/>
+                <a:ea typeface="Amiri" pitchFamily="2" charset="-78"/>
                 <a:cs typeface="Amiri" pitchFamily="2" charset="-78"/>
               </a:rPr>
               <a:t>م</a:t>
@@ -20758,6 +20910,7 @@
                   <a:srgbClr val="8A6D1E"/>
                 </a:solidFill>
                 <a:latin typeface="Amiri" pitchFamily="2" charset="-78"/>
+                <a:ea typeface="Amiri" pitchFamily="2" charset="-78"/>
                 <a:cs typeface="Amiri" pitchFamily="2" charset="-78"/>
               </a:rPr>
               <a:t>آدَابُ الصَّفِّ</a:t>
@@ -22289,6 +22442,7 @@
                   <a:srgbClr val="D4AF37"/>
                 </a:solidFill>
                 <a:latin typeface="Amiri" pitchFamily="2" charset="-78"/>
+                <a:ea typeface="Amiri" pitchFamily="2" charset="-78"/>
                 <a:cs typeface="Amiri" pitchFamily="2" charset="-78"/>
               </a:rPr>
               <a:t>م</a:t>
@@ -22609,6 +22763,7 @@
                   <a:srgbClr val="8A6D1E"/>
                 </a:solidFill>
                 <a:latin typeface="Amiri" pitchFamily="2" charset="-78"/>
+                <a:ea typeface="Amiri" pitchFamily="2" charset="-78"/>
                 <a:cs typeface="Amiri" pitchFamily="2" charset="-78"/>
               </a:rPr>
               <a:t>نَمُوذَجُ الإِجَابَةِ</a:t>
@@ -22851,6 +23006,7 @@
                   <a:srgbClr val="1B3B6F"/>
                 </a:solidFill>
                 <a:latin typeface="Amiri" pitchFamily="2" charset="-78"/>
+                <a:ea typeface="Amiri" pitchFamily="2" charset="-78"/>
                 <a:cs typeface="Amiri" pitchFamily="2" charset="-78"/>
               </a:rPr>
               <a:t>وَجْبَتِي المُفَضَّلَةُ الأَرُزُّ مَعَ الدَّجَاجِ.</a:t>
@@ -22927,6 +23083,7 @@
                   <a:srgbClr val="5A6472"/>
                 </a:solidFill>
                 <a:latin typeface="Amiri" pitchFamily="2" charset="-78"/>
+                <a:ea typeface="Amiri" pitchFamily="2" charset="-78"/>
                 <a:cs typeface="Amiri" pitchFamily="2" charset="-78"/>
               </a:rPr>
               <a:t>مَا وَجْبَتُكَ المُفَضَّلَةُ؟</a:t>
@@ -23043,6 +23200,7 @@
                   <a:srgbClr val="1B3B6F"/>
                 </a:solidFill>
                 <a:latin typeface="Amiri" pitchFamily="2" charset="-78"/>
+                <a:ea typeface="Amiri" pitchFamily="2" charset="-78"/>
                 <a:cs typeface="Amiri" pitchFamily="2" charset="-78"/>
               </a:rPr>
               <a:t>فِي وَقْتِ الفَرَاغِ أَقْرَأُ وَأَلْعَبُ كُرَةَ السَّلَّةِ.</a:t>
@@ -23119,6 +23277,7 @@
                   <a:srgbClr val="5A6472"/>
                 </a:solidFill>
                 <a:latin typeface="Amiri" pitchFamily="2" charset="-78"/>
+                <a:ea typeface="Amiri" pitchFamily="2" charset="-78"/>
                 <a:cs typeface="Amiri" pitchFamily="2" charset="-78"/>
               </a:rPr>
               <a:t>مَاذَا تَفْعَلُ فِي وَقْتِ الفَرَاغِ؟</a:t>
@@ -23235,6 +23394,7 @@
                   <a:srgbClr val="1B3B6F"/>
                 </a:solidFill>
                 <a:latin typeface="Amiri" pitchFamily="2" charset="-78"/>
+                <a:ea typeface="Amiri" pitchFamily="2" charset="-78"/>
                 <a:cs typeface="Amiri" pitchFamily="2" charset="-78"/>
               </a:rPr>
               <a:t>بَيْتِي كَبِيرٌ، فِيهِ أَرْبَعُ غُرَفٍ وَحَدِيقَةٌ.</a:t>
@@ -23311,6 +23471,7 @@
                   <a:srgbClr val="5A6472"/>
                 </a:solidFill>
                 <a:latin typeface="Amiri" pitchFamily="2" charset="-78"/>
+                <a:ea typeface="Amiri" pitchFamily="2" charset="-78"/>
                 <a:cs typeface="Amiri" pitchFamily="2" charset="-78"/>
               </a:rPr>
               <a:t>صِفْ بَيْتَكَ</a:t>
@@ -23427,6 +23588,7 @@
                   <a:srgbClr val="1B3B6F"/>
                 </a:solidFill>
                 <a:latin typeface="Amiri" pitchFamily="2" charset="-78"/>
+                <a:ea typeface="Amiri" pitchFamily="2" charset="-78"/>
                 <a:cs typeface="Amiri" pitchFamily="2" charset="-78"/>
               </a:rPr>
               <a:t>مَادَّتِي المُفَضَّلَةُ العُلُومُ، لِأَنَّهَا مُمْتِعَةٌ.</a:t>
@@ -23503,6 +23665,7 @@
                   <a:srgbClr val="5A6472"/>
                 </a:solidFill>
                 <a:latin typeface="Amiri" pitchFamily="2" charset="-78"/>
+                <a:ea typeface="Amiri" pitchFamily="2" charset="-78"/>
                 <a:cs typeface="Amiri" pitchFamily="2" charset="-78"/>
               </a:rPr>
               <a:t>مَا مَادَّتُكَ المُفَضَّلَةُ؟</a:t>
@@ -23619,6 +23782,7 @@
                   <a:srgbClr val="1B3B6F"/>
                 </a:solidFill>
                 <a:latin typeface="Amiri" pitchFamily="2" charset="-78"/>
+                <a:ea typeface="Amiri" pitchFamily="2" charset="-78"/>
                 <a:cs typeface="Amiri" pitchFamily="2" charset="-78"/>
               </a:rPr>
               <a:t>قَضَيْتُ عُطْلَتِي فِي إِسْبَانْيَا مَعَ عَائِلَتِي.</a:t>
@@ -23695,6 +23859,7 @@
                   <a:srgbClr val="5A6472"/>
                 </a:solidFill>
                 <a:latin typeface="Amiri" pitchFamily="2" charset="-78"/>
+                <a:ea typeface="Amiri" pitchFamily="2" charset="-78"/>
                 <a:cs typeface="Amiri" pitchFamily="2" charset="-78"/>
               </a:rPr>
               <a:t>أَيْنَ قَضَيْتَ عُطْلَتَكَ الأَخِيرَةَ؟</a:t>
@@ -23917,6 +24082,7 @@
                   <a:srgbClr val="D4AF37"/>
                 </a:solidFill>
                 <a:latin typeface="Amiri" pitchFamily="2" charset="-78"/>
+                <a:ea typeface="Amiri" pitchFamily="2" charset="-78"/>
                 <a:cs typeface="Amiri" pitchFamily="2" charset="-78"/>
               </a:rPr>
               <a:t>م</a:t>
@@ -24237,6 +24403,7 @@
                   <a:srgbClr val="8A6D1E"/>
                 </a:solidFill>
                 <a:latin typeface="Amiri" pitchFamily="2" charset="-78"/>
+                <a:ea typeface="Amiri" pitchFamily="2" charset="-78"/>
                 <a:cs typeface="Amiri" pitchFamily="2" charset="-78"/>
               </a:rPr>
               <a:t>نَمُوذَجُ الإِجَابَةِ</a:t>
@@ -24479,6 +24646,7 @@
                   <a:srgbClr val="1B3B6F"/>
                 </a:solidFill>
                 <a:latin typeface="Amiri" pitchFamily="2" charset="-78"/>
+                <a:ea typeface="Amiri" pitchFamily="2" charset="-78"/>
                 <a:cs typeface="Amiri" pitchFamily="2" charset="-78"/>
               </a:rPr>
               <a:t>أُحَاوِلُ أَنْ آكُلَ الخُضَارَ كُلَّ يَوْمٍ، لٰكِنَّنِي أُحِبُّ الحَلَوِيَّاتِ؛ وَمِنَ الآنَ سَأُقَلِّلُ السُّكَّرَ.</a:t>
@@ -24555,6 +24723,7 @@
                   <a:srgbClr val="5A6472"/>
                 </a:solidFill>
                 <a:latin typeface="Amiri" pitchFamily="2" charset="-78"/>
+                <a:ea typeface="Amiri" pitchFamily="2" charset="-78"/>
                 <a:cs typeface="Amiri" pitchFamily="2" charset="-78"/>
               </a:rPr>
               <a:t>هَلْ تَأْكُلُ بِطَرِيقَةٍ صِحِّيَّةٍ؟</a:t>
@@ -24671,6 +24840,7 @@
                   <a:srgbClr val="1B3B6F"/>
                 </a:solidFill>
                 <a:latin typeface="Amiri" pitchFamily="2" charset="-78"/>
+                <a:ea typeface="Amiri" pitchFamily="2" charset="-78"/>
                 <a:cs typeface="Amiri" pitchFamily="2" charset="-78"/>
               </a:rPr>
               <a:t>نُصَلِّي صَلَاةَ العِيدِ، ثُمَّ نَزُورُ أَقَارِبَنَا؛ وَفِي العِيدِ المَاضِي سَافَرْنَا إِلَى بَيْتِ جَدَّتِي.</a:t>
@@ -24747,6 +24917,7 @@
                   <a:srgbClr val="5A6472"/>
                 </a:solidFill>
                 <a:latin typeface="Amiri" pitchFamily="2" charset="-78"/>
+                <a:ea typeface="Amiri" pitchFamily="2" charset="-78"/>
                 <a:cs typeface="Amiri" pitchFamily="2" charset="-78"/>
               </a:rPr>
               <a:t>كَيْفَ تَحْتَفِلُ عَائِلَتُكَ بِالعِيدِ؟</a:t>
@@ -24863,6 +25034,7 @@
                   <a:srgbClr val="1B3B6F"/>
                 </a:solidFill>
                 <a:latin typeface="Amiri" pitchFamily="2" charset="-78"/>
+                <a:ea typeface="Amiri" pitchFamily="2" charset="-78"/>
                 <a:cs typeface="Amiri" pitchFamily="2" charset="-78"/>
               </a:rPr>
               <a:t>نَعَمْ، لِأَنَّ فِيهَا حَدَائِقَ وَمَكْتَبَةً كَبِيرَةً، لٰكِنْ يَنْقُصُهَا مَرْكَزٌ لِلشَّبَابِ.</a:t>
@@ -24939,6 +25111,7 @@
                   <a:srgbClr val="5A6472"/>
                 </a:solidFill>
                 <a:latin typeface="Amiri" pitchFamily="2" charset="-78"/>
+                <a:ea typeface="Amiri" pitchFamily="2" charset="-78"/>
                 <a:cs typeface="Amiri" pitchFamily="2" charset="-78"/>
               </a:rPr>
               <a:t>هَلْ تُحِبُّ مَدِينَتَكَ؟ لِمَاذَا؟</a:t>
@@ -25055,6 +25228,7 @@
                   <a:srgbClr val="1B3B6F"/>
                 </a:solidFill>
                 <a:latin typeface="Amiri" pitchFamily="2" charset="-78"/>
+                <a:ea typeface="Amiri" pitchFamily="2" charset="-78"/>
                 <a:cs typeface="Amiri" pitchFamily="2" charset="-78"/>
               </a:rPr>
               <a:t>سَأَرْتَاحُ أُسْبُوعًا، ثُمَّ سَأَبْحَثُ عَنْ عَمَلٍ صَيْفِيٍّ، لِأَنِّي أُرِيدُ أَنْ أَكْسِبَ خِبْرَةً.</a:t>
@@ -25131,6 +25305,7 @@
                   <a:srgbClr val="5A6472"/>
                 </a:solidFill>
                 <a:latin typeface="Amiri" pitchFamily="2" charset="-78"/>
+                <a:ea typeface="Amiri" pitchFamily="2" charset="-78"/>
                 <a:cs typeface="Amiri" pitchFamily="2" charset="-78"/>
               </a:rPr>
               <a:t>مَاذَا سَتَفْعَلُ بَعْدَ الامْتِحَانَاتِ؟</a:t>
@@ -25247,6 +25422,7 @@
                   <a:srgbClr val="1B3B6F"/>
                 </a:solidFill>
                 <a:latin typeface="Amiri" pitchFamily="2" charset="-78"/>
+                <a:ea typeface="Amiri" pitchFamily="2" charset="-78"/>
                 <a:cs typeface="Amiri" pitchFamily="2" charset="-78"/>
               </a:rPr>
               <a:t>أَتَعَلَّمُهَا لِأَفْهَمَ القُرْآنَ وَأَتَكَلَّمَ مَعَ أَقَارِبِي؛ وَعِنْدَمَا كُنْتُ صَغِيرًا كُنْتُ أَخْجَلُ مِنْ أَخْطَائِي.</a:t>
@@ -25323,6 +25499,7 @@
                   <a:srgbClr val="5A6472"/>
                 </a:solidFill>
                 <a:latin typeface="Amiri" pitchFamily="2" charset="-78"/>
+                <a:ea typeface="Amiri" pitchFamily="2" charset="-78"/>
                 <a:cs typeface="Amiri" pitchFamily="2" charset="-78"/>
               </a:rPr>
               <a:t>لِمَاذَا تَتَعَلَّمُ العَرَبِيَّةَ؟</a:t>
@@ -25545,6 +25722,7 @@
                   <a:srgbClr val="D4AF37"/>
                 </a:solidFill>
                 <a:latin typeface="Amiri" pitchFamily="2" charset="-78"/>
+                <a:ea typeface="Amiri" pitchFamily="2" charset="-78"/>
                 <a:cs typeface="Amiri" pitchFamily="2" charset="-78"/>
               </a:rPr>
               <a:t>م</a:t>
@@ -25865,6 +26043,7 @@
                   <a:srgbClr val="8A6D1E"/>
                 </a:solidFill>
                 <a:latin typeface="Amiri" pitchFamily="2" charset="-78"/>
+                <a:ea typeface="Amiri" pitchFamily="2" charset="-78"/>
                 <a:cs typeface="Amiri" pitchFamily="2" charset="-78"/>
               </a:rPr>
               <a:t>نَمُوذَجُ الإِجَابَةِ</a:t>
@@ -26107,6 +26286,7 @@
                   <a:srgbClr val="1B3B6F"/>
                 </a:solidFill>
                 <a:latin typeface="Amiri" pitchFamily="2" charset="-78"/>
+                <a:ea typeface="Amiri" pitchFamily="2" charset="-78"/>
                 <a:cs typeface="Amiri" pitchFamily="2" charset="-78"/>
               </a:rPr>
               <a:t>أَرَى أَنَّ المَسْؤُولِيَّةَ مُشْتَرَكَةٌ؛ فَالأُسْرَةُ تَخْتَارُ الطَّعَامَ فِي البَيْتِ، بَيْنَمَا تُعَلِّمُ المَدْرَسَةُ العَادَاتِ الصِّحِّيَّةَ وَتُوَفِّرُ الرِّيَاضَةَ.</a:t>
@@ -26183,6 +26363,7 @@
                   <a:srgbClr val="5A6472"/>
                 </a:solidFill>
                 <a:latin typeface="Amiri" pitchFamily="2" charset="-78"/>
+                <a:ea typeface="Amiri" pitchFamily="2" charset="-78"/>
                 <a:cs typeface="Amiri" pitchFamily="2" charset="-78"/>
               </a:rPr>
               <a:t>مَنِ المَسْؤُولُ عَنْ صِحَّةِ الشَّبَابِ</a:t>
@@ -26209,6 +26390,7 @@
                   <a:srgbClr val="5A6472"/>
                 </a:solidFill>
                 <a:latin typeface="Amiri" pitchFamily="2" charset="-78"/>
+                <a:ea typeface="Amiri" pitchFamily="2" charset="-78"/>
                 <a:cs typeface="Amiri" pitchFamily="2" charset="-78"/>
               </a:rPr>
               <a:t>الأُسْرَةُ أَمِ المَدْرَسَةُ؟</a:t>
@@ -26325,6 +26507,7 @@
                   <a:srgbClr val="1B3B6F"/>
                 </a:solidFill>
                 <a:latin typeface="Amiri" pitchFamily="2" charset="-78"/>
+                <a:ea typeface="Amiri" pitchFamily="2" charset="-78"/>
                 <a:cs typeface="Amiri" pitchFamily="2" charset="-78"/>
               </a:rPr>
               <a:t>صَحِيحٌ أَنَّهَا وَفَّرَتْ عَلَيْنَا الوَقْتَ، غَيْرَ أَنَّهَا جَعَلَتْنَا مَشْغُولِينَ دَائِمًا، مِمَّا يُقَلِّلُ وَقْتَ الرَّاحَةِ وَالتَّفْكِيرِ.</a:t>
@@ -26401,6 +26584,7 @@
                   <a:srgbClr val="5A6472"/>
                 </a:solidFill>
                 <a:latin typeface="Amiri" pitchFamily="2" charset="-78"/>
+                <a:ea typeface="Amiri" pitchFamily="2" charset="-78"/>
                 <a:cs typeface="Amiri" pitchFamily="2" charset="-78"/>
               </a:rPr>
               <a:t>هَلْ جَعَلَتِ التِّكْنُولُوجْيَا حَيَاتَنَا أَسْهَلَ؟</a:t>
@@ -26517,6 +26701,7 @@
                   <a:srgbClr val="1B3B6F"/>
                 </a:solidFill>
                 <a:latin typeface="Amiri" pitchFamily="2" charset="-78"/>
+                <a:ea typeface="Amiri" pitchFamily="2" charset="-78"/>
                 <a:cs typeface="Amiri" pitchFamily="2" charset="-78"/>
               </a:rPr>
               <a:t>فِي رَأْيِي، المُوَاصَلَاتُ النَّظِيفَةُ وَالمَسَاحَاتُ الخَضْرَاءُ، لِأَنَّهَا تُقَرِّبُ النَّاسَ بَعْضَهُمْ مِنْ بَعْضٍ، مِمَّا يَبْنِي مُجْتَمَعًا أَقْوَى.</a:t>
@@ -26593,6 +26778,7 @@
                   <a:srgbClr val="5A6472"/>
                 </a:solidFill>
                 <a:latin typeface="Amiri" pitchFamily="2" charset="-78"/>
+                <a:ea typeface="Amiri" pitchFamily="2" charset="-78"/>
                 <a:cs typeface="Amiri" pitchFamily="2" charset="-78"/>
               </a:rPr>
               <a:t>مَا الَّذِي يَجْعَلُ المَدِينَةَ مَكَانًا جَيِّدًا لِلْعَيْشِ؟</a:t>
@@ -26815,6 +27001,7 @@
                   <a:srgbClr val="D4AF37"/>
                 </a:solidFill>
                 <a:latin typeface="Amiri" pitchFamily="2" charset="-78"/>
+                <a:ea typeface="Amiri" pitchFamily="2" charset="-78"/>
                 <a:cs typeface="Amiri" pitchFamily="2" charset="-78"/>
               </a:rPr>
               <a:t>م</a:t>
@@ -27135,6 +27322,7 @@
                   <a:srgbClr val="8A6D1E"/>
                 </a:solidFill>
                 <a:latin typeface="Amiri" pitchFamily="2" charset="-78"/>
+                <a:ea typeface="Amiri" pitchFamily="2" charset="-78"/>
                 <a:cs typeface="Amiri" pitchFamily="2" charset="-78"/>
               </a:rPr>
               <a:t>نَمُوذَجُ الإِجَابَةِ</a:t>
@@ -27377,6 +27565,7 @@
                   <a:srgbClr val="1B3B6F"/>
                 </a:solidFill>
                 <a:latin typeface="Amiri" pitchFamily="2" charset="-78"/>
+                <a:ea typeface="Amiri" pitchFamily="2" charset="-78"/>
                 <a:cs typeface="Amiri" pitchFamily="2" charset="-78"/>
               </a:rPr>
               <a:t>مِنْ نَاحِيَةٍ، يُوَسِّعُ العَمَلُ فِي الخَارِجِ خِبْرَتَنَا وَيُعَلِّمُنَا الاسْتِقْلَالَ، وَمِنْ نَاحِيَةٍ أُخْرَى، قَدْ نَشْعُرُ بِالوَحْدَةِ بَعِيدًا عَنِ العَائِلَةِ.</a:t>
@@ -27453,6 +27642,7 @@
                   <a:srgbClr val="5A6472"/>
                 </a:solidFill>
                 <a:latin typeface="Amiri" pitchFamily="2" charset="-78"/>
+                <a:ea typeface="Amiri" pitchFamily="2" charset="-78"/>
                 <a:cs typeface="Amiri" pitchFamily="2" charset="-78"/>
               </a:rPr>
               <a:t>هَلِ العَمَلُ فِي الخَارِجِ فِكْرَةٌ جَيِّدَةٌ؟</a:t>
@@ -27569,6 +27759,7 @@
                   <a:srgbClr val="1B3B6F"/>
                 </a:solidFill>
                 <a:latin typeface="Amiri" pitchFamily="2" charset="-78"/>
+                <a:ea typeface="Amiri" pitchFamily="2" charset="-78"/>
                 <a:cs typeface="Amiri" pitchFamily="2" charset="-78"/>
               </a:rPr>
               <a:t>لَوْ عُدْتُ، لَبَدَأْتُ المُرَاجَعَةَ مُبَكِّرًا، وَلَقَرَأْتُ بِالعَرَبِيَّةِ كُلَّ يَوْمٍ، لِأَنَّ القَلِيلَ الدَّائِمَ خَيْرٌ مِنَ الكَثِيرِ المُنْقَطِعِ.</a:t>
@@ -27648,6 +27839,7 @@
                   <a:srgbClr val="1B3B6F"/>
                 </a:solidFill>
                 <a:latin typeface="Amiri" pitchFamily="2" charset="-78"/>
+                <a:ea typeface="Amiri" pitchFamily="2" charset="-78"/>
                 <a:cs typeface="Amiri" pitchFamily="2" charset="-78"/>
               </a:rPr>
               <a:t>لَوْ عُدْتَ إِلَى بِدَايَةِ الصَّفِّ العَاشِرِ، فَمَاذَا تُغَيِّرُ؟</a:t>
@@ -27857,6 +28049,7 @@
                   <a:srgbClr val="D4AF37"/>
                 </a:solidFill>
                 <a:latin typeface="Amiri" pitchFamily="2" charset="-78"/>
+                <a:ea typeface="Amiri" pitchFamily="2" charset="-78"/>
                 <a:cs typeface="Amiri" pitchFamily="2" charset="-78"/>
               </a:rPr>
               <a:t>م</a:t>
@@ -28177,6 +28370,7 @@
                   <a:srgbClr val="8A6D1E"/>
                 </a:solidFill>
                 <a:latin typeface="Amiri" pitchFamily="2" charset="-78"/>
+                <a:ea typeface="Amiri" pitchFamily="2" charset="-78"/>
                 <a:cs typeface="Amiri" pitchFamily="2" charset="-78"/>
               </a:rPr>
               <a:t>قَيِّمْ عَمَلَكَ</a:t>
@@ -29421,6 +29615,7 @@
                   <a:srgbClr val="FFFFFF"/>
                 </a:solidFill>
                 <a:latin typeface="Amiri" pitchFamily="2" charset="-78"/>
+                <a:ea typeface="Amiri" pitchFamily="2" charset="-78"/>
                 <a:cs typeface="Amiri" pitchFamily="2" charset="-78"/>
               </a:rPr>
               <a:t>أَحْسَنْتُمْ! إِلَى اللِّقَاءِ</a:t>
@@ -29573,6 +29768,7 @@
                   <a:srgbClr val="D4AF37"/>
                 </a:solidFill>
                 <a:latin typeface="Amiri" pitchFamily="2" charset="-78"/>
+                <a:ea typeface="Amiri" pitchFamily="2" charset="-78"/>
                 <a:cs typeface="Amiri" pitchFamily="2" charset="-78"/>
               </a:rPr>
               <a:t>وَرْشَةُ الكِتَابَةِ</a:t>
@@ -29706,6 +29902,7 @@
                   <a:srgbClr val="D4AF37"/>
                 </a:solidFill>
                 <a:latin typeface="Amiri" pitchFamily="2" charset="-78"/>
+                <a:ea typeface="Amiri" pitchFamily="2" charset="-78"/>
                 <a:cs typeface="Amiri" pitchFamily="2" charset="-78"/>
               </a:rPr>
               <a:t>م</a:t>
@@ -30026,6 +30223,7 @@
                   <a:srgbClr val="8A6D1E"/>
                 </a:solidFill>
                 <a:latin typeface="Amiri" pitchFamily="2" charset="-78"/>
+                <a:ea typeface="Amiri" pitchFamily="2" charset="-78"/>
                 <a:cs typeface="Amiri" pitchFamily="2" charset="-78"/>
               </a:rPr>
               <a:t>خَرِيطَةُ الوَرْشَةِ</a:t>
@@ -30340,6 +30538,7 @@
                   <a:srgbClr val="1B3B6F"/>
                 </a:solidFill>
                 <a:latin typeface="Amiri" pitchFamily="2" charset="-78"/>
+                <a:ea typeface="Amiri" pitchFamily="2" charset="-78"/>
                 <a:cs typeface="Amiri" pitchFamily="2" charset="-78"/>
               </a:rPr>
               <a:t>كَيْفَ</a:t>
@@ -30616,6 +30815,7 @@
                   <a:srgbClr val="1E6B52"/>
                 </a:solidFill>
                 <a:latin typeface="Amiri" pitchFamily="2" charset="-78"/>
+                <a:ea typeface="Amiri" pitchFamily="2" charset="-78"/>
                 <a:cs typeface="Amiri" pitchFamily="2" charset="-78"/>
               </a:rPr>
               <a:t>تَمْثِيلُ الدَّوْرِ</a:t>
@@ -30892,6 +31092,7 @@
                   <a:srgbClr val="8A6D1E"/>
                 </a:solidFill>
                 <a:latin typeface="Amiri" pitchFamily="2" charset="-78"/>
+                <a:ea typeface="Amiri" pitchFamily="2" charset="-78"/>
                 <a:cs typeface="Amiri" pitchFamily="2" charset="-78"/>
               </a:rPr>
               <a:t>النَّمُوذَجُ</a:t>
@@ -31168,6 +31369,7 @@
                   <a:srgbClr val="1E6B52"/>
                 </a:solidFill>
                 <a:latin typeface="Amiri" pitchFamily="2" charset="-78"/>
+                <a:ea typeface="Amiri" pitchFamily="2" charset="-78"/>
                 <a:cs typeface="Amiri" pitchFamily="2" charset="-78"/>
               </a:rPr>
               <a:t>المُحَادَثَةُ</a:t>
@@ -31444,6 +31646,7 @@
                   <a:srgbClr val="8A6D1E"/>
                 </a:solidFill>
                 <a:latin typeface="Amiri" pitchFamily="2" charset="-78"/>
+                <a:ea typeface="Amiri" pitchFamily="2" charset="-78"/>
                 <a:cs typeface="Amiri" pitchFamily="2" charset="-78"/>
               </a:rPr>
               <a:t>قَيِّمْ</a:t>
@@ -31687,6 +31890,7 @@
                   <a:srgbClr val="D4AF37"/>
                 </a:solidFill>
                 <a:latin typeface="Amiri" pitchFamily="2" charset="-78"/>
+                <a:ea typeface="Amiri" pitchFamily="2" charset="-78"/>
                 <a:cs typeface="Amiri" pitchFamily="2" charset="-78"/>
               </a:rPr>
               <a:t>م</a:t>
@@ -32007,6 +32211,7 @@
                   <a:srgbClr val="8A6D1E"/>
                 </a:solidFill>
                 <a:latin typeface="Amiri" pitchFamily="2" charset="-78"/>
+                <a:ea typeface="Amiri" pitchFamily="2" charset="-78"/>
                 <a:cs typeface="Amiri" pitchFamily="2" charset="-78"/>
               </a:rPr>
               <a:t>امْتِحَانُ التَّحَدُّثِ</a:t>
@@ -32631,6 +32836,7 @@
                   <a:srgbClr val="1B3B6F"/>
                 </a:solidFill>
                 <a:latin typeface="Amiri" pitchFamily="2" charset="-78"/>
+                <a:ea typeface="Amiri" pitchFamily="2" charset="-78"/>
                 <a:cs typeface="Amiri" pitchFamily="2" charset="-78"/>
               </a:rPr>
               <a:t>عَفْوًا، هَلْ يُمْكِنُ أَنْ تُعِيدَ السُّؤَالَ؟</a:t>
@@ -32730,6 +32936,7 @@
                   <a:srgbClr val="1B3B6F"/>
                 </a:solidFill>
                 <a:latin typeface="Amiri" pitchFamily="2" charset="-78"/>
+                <a:ea typeface="Amiri" pitchFamily="2" charset="-78"/>
                 <a:cs typeface="Amiri" pitchFamily="2" charset="-78"/>
               </a:rPr>
               <a:t>لَحْظَةً، دَعْنِي أُفَكِّرُ …</a:t>
@@ -32829,6 +33036,7 @@
                   <a:srgbClr val="1B3B6F"/>
                 </a:solidFill>
                 <a:latin typeface="Amiri" pitchFamily="2" charset="-78"/>
+                <a:ea typeface="Amiri" pitchFamily="2" charset="-78"/>
                 <a:cs typeface="Amiri" pitchFamily="2" charset="-78"/>
               </a:rPr>
               <a:t>أَقْصِدُ …</a:t>
@@ -33000,6 +33208,7 @@
                   <a:srgbClr val="D4AF37"/>
                 </a:solidFill>
                 <a:latin typeface="Amiri" pitchFamily="2" charset="-78"/>
+                <a:ea typeface="Amiri" pitchFamily="2" charset="-78"/>
                 <a:cs typeface="Amiri" pitchFamily="2" charset="-78"/>
               </a:rPr>
               <a:t>م</a:t>
@@ -33320,6 +33529,7 @@
                   <a:srgbClr val="8A6D1E"/>
                 </a:solidFill>
                 <a:latin typeface="Amiri" pitchFamily="2" charset="-78"/>
+                <a:ea typeface="Amiri" pitchFamily="2" charset="-78"/>
                 <a:cs typeface="Amiri" pitchFamily="2" charset="-78"/>
               </a:rPr>
               <a:t>كُلُّ مَا تَحْتَاجُ إِلَيْهِ</a:t>
@@ -33623,6 +33833,7 @@
                   <a:srgbClr val="1B3B6F"/>
                 </a:solidFill>
                 <a:latin typeface="Amiri" pitchFamily="2" charset="-78"/>
+                <a:ea typeface="Amiri" pitchFamily="2" charset="-78"/>
                 <a:cs typeface="Amiri" pitchFamily="2" charset="-78"/>
               </a:rPr>
               <a:t>أُرِيدُ … مِنْ فَضْلِكَ</a:t>
@@ -33780,6 +33991,7 @@
                   <a:srgbClr val="1B3B6F"/>
                 </a:solidFill>
                 <a:latin typeface="Amiri" pitchFamily="2" charset="-78"/>
+                <a:ea typeface="Amiri" pitchFamily="2" charset="-78"/>
                 <a:cs typeface="Amiri" pitchFamily="2" charset="-78"/>
               </a:rPr>
               <a:t>الحِسَابُ</a:t>
@@ -33883,6 +34095,7 @@
                   <a:srgbClr val="1B3B6F"/>
                 </a:solidFill>
                 <a:latin typeface="Amiri" pitchFamily="2" charset="-78"/>
+                <a:ea typeface="Amiri" pitchFamily="2" charset="-78"/>
                 <a:cs typeface="Amiri" pitchFamily="2" charset="-78"/>
               </a:rPr>
               <a:t>مِنْ فَضْلِكِ</a:t>
@@ -34148,6 +34361,7 @@
                   <a:srgbClr val="1B3B6F"/>
                 </a:solidFill>
                 <a:latin typeface="Amiri" pitchFamily="2" charset="-78"/>
+                <a:ea typeface="Amiri" pitchFamily="2" charset="-78"/>
                 <a:cs typeface="Amiri" pitchFamily="2" charset="-78"/>
               </a:rPr>
               <a:t>عَصِيرُ بُرْتُقَالٍ · فَطِيرَةٌ</a:t>
@@ -34305,6 +34519,7 @@
                   <a:srgbClr val="1B3B6F"/>
                 </a:solidFill>
                 <a:latin typeface="Amiri" pitchFamily="2" charset="-78"/>
+                <a:ea typeface="Amiri" pitchFamily="2" charset="-78"/>
                 <a:cs typeface="Amiri" pitchFamily="2" charset="-78"/>
               </a:rPr>
               <a:t>سُكَّرٌ</a:t>
@@ -34408,6 +34623,7 @@
                   <a:srgbClr val="1B3B6F"/>
                 </a:solidFill>
                 <a:latin typeface="Amiri" pitchFamily="2" charset="-78"/>
+                <a:ea typeface="Amiri" pitchFamily="2" charset="-78"/>
                 <a:cs typeface="Amiri" pitchFamily="2" charset="-78"/>
               </a:rPr>
               <a:t>مَعَ / بِدُونِ</a:t>
@@ -34673,6 +34889,7 @@
                   <a:srgbClr val="1B3B6F"/>
                 </a:solidFill>
                 <a:latin typeface="Amiri" pitchFamily="2" charset="-78"/>
+                <a:ea typeface="Amiri" pitchFamily="2" charset="-78"/>
                 <a:cs typeface="Amiri" pitchFamily="2" charset="-78"/>
               </a:rPr>
               <a:t>عِنْدِي صُدَاعٌ وَحُمَّى</a:t>
@@ -34830,6 +35047,7 @@
                   <a:srgbClr val="1B3B6F"/>
                 </a:solidFill>
                 <a:latin typeface="Amiri" pitchFamily="2" charset="-78"/>
+                <a:ea typeface="Amiri" pitchFamily="2" charset="-78"/>
                 <a:cs typeface="Amiri" pitchFamily="2" charset="-78"/>
               </a:rPr>
               <a:t>سُعَالٌ</a:t>
@@ -34933,6 +35151,7 @@
                   <a:srgbClr val="1B3B6F"/>
                 </a:solidFill>
                 <a:latin typeface="Amiri" pitchFamily="2" charset="-78"/>
+                <a:ea typeface="Amiri" pitchFamily="2" charset="-78"/>
                 <a:cs typeface="Amiri" pitchFamily="2" charset="-78"/>
               </a:rPr>
               <a:t>مُنْذُ أَمْسِ</a:t>
@@ -35198,6 +35417,7 @@
                   <a:srgbClr val="1B3B6F"/>
                 </a:solidFill>
                 <a:latin typeface="Amiri" pitchFamily="2" charset="-78"/>
+                <a:ea typeface="Amiri" pitchFamily="2" charset="-78"/>
                 <a:cs typeface="Amiri" pitchFamily="2" charset="-78"/>
               </a:rPr>
               <a:t>مَرَّتَيْنِ فِي اليَوْمِ بَعْدَ الأَكْلِ</a:t>
@@ -35355,6 +35575,7 @@
                   <a:srgbClr val="1B3B6F"/>
                 </a:solidFill>
                 <a:latin typeface="Amiri" pitchFamily="2" charset="-78"/>
+                <a:ea typeface="Amiri" pitchFamily="2" charset="-78"/>
                 <a:cs typeface="Amiri" pitchFamily="2" charset="-78"/>
               </a:rPr>
               <a:t>دَوَاءٌ</a:t>
@@ -35458,6 +35679,7 @@
                   <a:srgbClr val="1B3B6F"/>
                 </a:solidFill>
                 <a:latin typeface="Amiri" pitchFamily="2" charset="-78"/>
+                <a:ea typeface="Amiri" pitchFamily="2" charset="-78"/>
                 <a:cs typeface="Amiri" pitchFamily="2" charset="-78"/>
               </a:rPr>
               <a:t>أَقْرَاصٌ</a:t>
@@ -35723,6 +35945,7 @@
                   <a:srgbClr val="1B3B6F"/>
                 </a:solidFill>
                 <a:latin typeface="Amiri" pitchFamily="2" charset="-78"/>
+                <a:ea typeface="Amiri" pitchFamily="2" charset="-78"/>
                 <a:cs typeface="Amiri" pitchFamily="2" charset="-78"/>
               </a:rPr>
               <a:t>عَمَلٌ جُزْئِيٌّ · مُقَابَلَةٌ</a:t>
@@ -35880,6 +36103,7 @@
                   <a:srgbClr val="1B3B6F"/>
                 </a:solidFill>
                 <a:latin typeface="Amiri" pitchFamily="2" charset="-78"/>
+                <a:ea typeface="Amiri" pitchFamily="2" charset="-78"/>
                 <a:cs typeface="Amiri" pitchFamily="2" charset="-78"/>
               </a:rPr>
               <a:t>سَاعَاتُ العَمَلِ</a:t>
@@ -35983,6 +36207,7 @@
                   <a:srgbClr val="1B3B6F"/>
                 </a:solidFill>
                 <a:latin typeface="Amiri" pitchFamily="2" charset="-78"/>
+                <a:ea typeface="Amiri" pitchFamily="2" charset="-78"/>
                 <a:cs typeface="Amiri" pitchFamily="2" charset="-78"/>
               </a:rPr>
               <a:t>رَاتِبٌ</a:t>
@@ -36248,6 +36473,7 @@
                   <a:srgbClr val="1B3B6F"/>
                 </a:solidFill>
                 <a:latin typeface="Amiri" pitchFamily="2" charset="-78"/>
+                <a:ea typeface="Amiri" pitchFamily="2" charset="-78"/>
                 <a:cs typeface="Amiri" pitchFamily="2" charset="-78"/>
               </a:rPr>
               <a:t>أُجِيدُ … · أَتَكَلَّمُ … بِطَلَاقَةٍ</a:t>
@@ -36405,6 +36631,7 @@
                   <a:srgbClr val="1B3B6F"/>
                 </a:solidFill>
                 <a:latin typeface="Amiri" pitchFamily="2" charset="-78"/>
+                <a:ea typeface="Amiri" pitchFamily="2" charset="-78"/>
                 <a:cs typeface="Amiri" pitchFamily="2" charset="-78"/>
               </a:rPr>
               <a:t>مَهَارَاتٌ</a:t>
@@ -36508,6 +36735,7 @@
                   <a:srgbClr val="1B3B6F"/>
                 </a:solidFill>
                 <a:latin typeface="Amiri" pitchFamily="2" charset="-78"/>
+                <a:ea typeface="Amiri" pitchFamily="2" charset="-78"/>
                 <a:cs typeface="Amiri" pitchFamily="2" charset="-78"/>
               </a:rPr>
               <a:t>أُجِيدُ</a:t>
@@ -36534,6 +36762,7 @@
                   <a:srgbClr val="1B3B6F"/>
                 </a:solidFill>
                 <a:latin typeface="Amiri" pitchFamily="2" charset="-78"/>
+                <a:ea typeface="Amiri" pitchFamily="2" charset="-78"/>
                 <a:cs typeface="Amiri" pitchFamily="2" charset="-78"/>
               </a:rPr>
               <a:t>أَتَكَلَّمُ</a:t>
@@ -36680,6 +36909,7 @@
                   <a:srgbClr val="D4AF37"/>
                 </a:solidFill>
                 <a:latin typeface="Amiri" pitchFamily="2" charset="-78"/>
+                <a:ea typeface="Amiri" pitchFamily="2" charset="-78"/>
                 <a:cs typeface="Amiri" pitchFamily="2" charset="-78"/>
               </a:rPr>
               <a:t>م</a:t>
@@ -37000,6 +37230,7 @@
                   <a:srgbClr val="8A6D1E"/>
                 </a:solidFill>
                 <a:latin typeface="Amiri" pitchFamily="2" charset="-78"/>
+                <a:ea typeface="Amiri" pitchFamily="2" charset="-78"/>
                 <a:cs typeface="Amiri" pitchFamily="2" charset="-78"/>
               </a:rPr>
               <a:t>اخْتِمْ بِقُوَّةٍ</a:t>
@@ -37303,6 +37534,7 @@
                   <a:srgbClr val="1B3B6F"/>
                 </a:solidFill>
                 <a:latin typeface="Amiri" pitchFamily="2" charset="-78"/>
+                <a:ea typeface="Amiri" pitchFamily="2" charset="-78"/>
                 <a:cs typeface="Amiri" pitchFamily="2" charset="-78"/>
               </a:rPr>
               <a:t>لُغَةٌ أَجْنَبِيَّةٌ · لُغَاتٌ</a:t>
@@ -37460,6 +37692,7 @@
                   <a:srgbClr val="1B3B6F"/>
                 </a:solidFill>
                 <a:latin typeface="Amiri" pitchFamily="2" charset="-78"/>
+                <a:ea typeface="Amiri" pitchFamily="2" charset="-78"/>
                 <a:cs typeface="Amiri" pitchFamily="2" charset="-78"/>
               </a:rPr>
               <a:t>ثُنَائِيُّ اللُّغَةِ</a:t>
@@ -37563,6 +37796,7 @@
                   <a:srgbClr val="1B3B6F"/>
                 </a:solidFill>
                 <a:latin typeface="Amiri" pitchFamily="2" charset="-78"/>
+                <a:ea typeface="Amiri" pitchFamily="2" charset="-78"/>
                 <a:cs typeface="Amiri" pitchFamily="2" charset="-78"/>
               </a:rPr>
               <a:t>اللُّغَةُ الأُمُّ</a:t>
@@ -37828,6 +38062,7 @@
                   <a:srgbClr val="1B3B6F"/>
                 </a:solidFill>
                 <a:latin typeface="Amiri" pitchFamily="2" charset="-78"/>
+                <a:ea typeface="Amiri" pitchFamily="2" charset="-78"/>
                 <a:cs typeface="Amiri" pitchFamily="2" charset="-78"/>
               </a:rPr>
               <a:t>يُسَاعِدُ عَلَى … مِمَّا …</a:t>
@@ -37985,6 +38220,7 @@
                   <a:srgbClr val="1B3B6F"/>
                 </a:solidFill>
                 <a:latin typeface="Amiri" pitchFamily="2" charset="-78"/>
+                <a:ea typeface="Amiri" pitchFamily="2" charset="-78"/>
                 <a:cs typeface="Amiri" pitchFamily="2" charset="-78"/>
               </a:rPr>
               <a:t>بِفَضْلِ</a:t>
@@ -38088,6 +38324,7 @@
                   <a:srgbClr val="1B3B6F"/>
                 </a:solidFill>
                 <a:latin typeface="Amiri" pitchFamily="2" charset="-78"/>
+                <a:ea typeface="Amiri" pitchFamily="2" charset="-78"/>
                 <a:cs typeface="Amiri" pitchFamily="2" charset="-78"/>
               </a:rPr>
               <a:t>لِذٰلِكَ</a:t>
@@ -38353,6 +38590,7 @@
                   <a:srgbClr val="1B3B6F"/>
                 </a:solidFill>
                 <a:latin typeface="Amiri" pitchFamily="2" charset="-78"/>
+                <a:ea typeface="Amiri" pitchFamily="2" charset="-78"/>
                 <a:cs typeface="Amiri" pitchFamily="2" charset="-78"/>
               </a:rPr>
               <a:t>أَسْهَلُ مِنْ · أَصْعَبُ مِنْ</a:t>
@@ -38510,6 +38748,7 @@
                   <a:srgbClr val="1B3B6F"/>
                 </a:solidFill>
                 <a:latin typeface="Amiri" pitchFamily="2" charset="-78"/>
+                <a:ea typeface="Amiri" pitchFamily="2" charset="-78"/>
                 <a:cs typeface="Amiri" pitchFamily="2" charset="-78"/>
               </a:rPr>
               <a:t>بَيْنَمَا</a:t>
@@ -38613,6 +38852,7 @@
                   <a:srgbClr val="1B3B6F"/>
                 </a:solidFill>
                 <a:latin typeface="Amiri" pitchFamily="2" charset="-78"/>
+                <a:ea typeface="Amiri" pitchFamily="2" charset="-78"/>
                 <a:cs typeface="Amiri" pitchFamily="2" charset="-78"/>
               </a:rPr>
               <a:t>أَكْثَرُ … / أَهَمُّ</a:t>
@@ -38878,6 +39118,7 @@
                   <a:srgbClr val="1B3B6F"/>
                 </a:solidFill>
                 <a:latin typeface="Amiri" pitchFamily="2" charset="-78"/>
+                <a:ea typeface="Amiri" pitchFamily="2" charset="-78"/>
                 <a:cs typeface="Amiri" pitchFamily="2" charset="-78"/>
               </a:rPr>
               <a:t>تُدَرَّسُ · يُتَكَلَّمُ بِهَا</a:t>
@@ -39035,6 +39276,7 @@
                   <a:srgbClr val="1B3B6F"/>
                 </a:solidFill>
                 <a:latin typeface="Amiri" pitchFamily="2" charset="-78"/>
+                <a:ea typeface="Amiri" pitchFamily="2" charset="-78"/>
                 <a:cs typeface="Amiri" pitchFamily="2" charset="-78"/>
               </a:rPr>
               <a:t>يُسْتَخْدَمُ</a:t>
@@ -39138,6 +39380,7 @@
                   <a:srgbClr val="1B3B6F"/>
                 </a:solidFill>
                 <a:latin typeface="Amiri" pitchFamily="2" charset="-78"/>
+                <a:ea typeface="Amiri" pitchFamily="2" charset="-78"/>
                 <a:cs typeface="Amiri" pitchFamily="2" charset="-78"/>
               </a:rPr>
               <a:t>افْتُتِحَ</a:t>
@@ -39403,6 +39646,7 @@
                   <a:srgbClr val="1B3B6F"/>
                 </a:solidFill>
                 <a:latin typeface="Amiri" pitchFamily="2" charset="-78"/>
+                <a:ea typeface="Amiri" pitchFamily="2" charset="-78"/>
                 <a:cs typeface="Amiri" pitchFamily="2" charset="-78"/>
               </a:rPr>
               <a:t>عِنْدَمَا كُنْتُ صَغِيرًا … أَمَّا الآنَ فَإِنِّي …</a:t>
@@ -39560,6 +39804,7 @@
                   <a:srgbClr val="1B3B6F"/>
                 </a:solidFill>
                 <a:latin typeface="Amiri" pitchFamily="2" charset="-78"/>
+                <a:ea typeface="Amiri" pitchFamily="2" charset="-78"/>
                 <a:cs typeface="Amiri" pitchFamily="2" charset="-78"/>
               </a:rPr>
               <a:t>فِي السَّنَةِ القَادِمَةِ</a:t>
@@ -39663,6 +39908,7 @@
                   <a:srgbClr val="1B3B6F"/>
                 </a:solidFill>
                 <a:latin typeface="Amiri" pitchFamily="2" charset="-78"/>
+                <a:ea typeface="Amiri" pitchFamily="2" charset="-78"/>
                 <a:cs typeface="Amiri" pitchFamily="2" charset="-78"/>
               </a:rPr>
               <a:t>صَغِيرَةً</a:t>
@@ -39928,6 +40174,7 @@
                   <a:srgbClr val="1B3B6F"/>
                 </a:solidFill>
                 <a:latin typeface="Amiri" pitchFamily="2" charset="-78"/>
+                <a:ea typeface="Amiri" pitchFamily="2" charset="-78"/>
                 <a:cs typeface="Amiri" pitchFamily="2" charset="-78"/>
               </a:rPr>
               <a:t>صَحِيحٌ أَنَّ … غَيْرَ أَنَّ …</a:t>
@@ -40085,6 +40332,7 @@
                   <a:srgbClr val="1B3B6F"/>
                 </a:solidFill>
                 <a:latin typeface="Amiri" pitchFamily="2" charset="-78"/>
+                <a:ea typeface="Amiri" pitchFamily="2" charset="-78"/>
                 <a:cs typeface="Amiri" pitchFamily="2" charset="-78"/>
               </a:rPr>
               <a:t>فِي رَأْيِي</a:t>
@@ -40188,6 +40436,7 @@
                   <a:srgbClr val="1B3B6F"/>
                 </a:solidFill>
                 <a:latin typeface="Amiri" pitchFamily="2" charset="-78"/>
+                <a:ea typeface="Amiri" pitchFamily="2" charset="-78"/>
                 <a:cs typeface="Amiri" pitchFamily="2" charset="-78"/>
               </a:rPr>
               <a:t>لَوْ … لَتَعَلَّمْتُ</a:t>
@@ -40321,6 +40570,7 @@
                   <a:srgbClr val="D4AF37"/>
                 </a:solidFill>
                 <a:latin typeface="Amiri" pitchFamily="2" charset="-78"/>
+                <a:ea typeface="Amiri" pitchFamily="2" charset="-78"/>
                 <a:cs typeface="Amiri" pitchFamily="2" charset="-78"/>
               </a:rPr>
               <a:t>م</a:t>
@@ -40641,6 +40891,7 @@
                   <a:srgbClr val="8A6D1E"/>
                 </a:solidFill>
                 <a:latin typeface="Amiri" pitchFamily="2" charset="-78"/>
+                <a:ea typeface="Amiri" pitchFamily="2" charset="-78"/>
                 <a:cs typeface="Amiri" pitchFamily="2" charset="-78"/>
               </a:rPr>
               <a:t>فِي الغُرَفِ</a:t>
@@ -41817,6 +42068,7 @@
                   <a:srgbClr val="1B3B6F"/>
                 </a:solidFill>
                 <a:latin typeface="Amiri" pitchFamily="2" charset="-78"/>
+                <a:ea typeface="Amiri" pitchFamily="2" charset="-78"/>
                 <a:cs typeface="Amiri" pitchFamily="2" charset="-78"/>
               </a:rPr>
               <a:t>دَوْرُكَ!</a:t>
@@ -41893,6 +42145,7 @@
                   <a:srgbClr val="1B3B6F"/>
                 </a:solidFill>
                 <a:latin typeface="Amiri" pitchFamily="2" charset="-78"/>
+                <a:ea typeface="Amiri" pitchFamily="2" charset="-78"/>
                 <a:cs typeface="Amiri" pitchFamily="2" charset="-78"/>
               </a:rPr>
               <a:t>أَحْسَنْتَ! / أَحْسَنْتِ!</a:t>
@@ -41969,6 +42222,7 @@
                   <a:srgbClr val="1B3B6F"/>
                 </a:solidFill>
                 <a:latin typeface="Amiri" pitchFamily="2" charset="-78"/>
+                <a:ea typeface="Amiri" pitchFamily="2" charset="-78"/>
                 <a:cs typeface="Amiri" pitchFamily="2" charset="-78"/>
               </a:rPr>
               <a:t>تَكَلَّمْ أَكْثَرَ، مِنْ فَضْلِكَ</a:t>
@@ -42045,6 +42299,7 @@
                   <a:srgbClr val="1B3B6F"/>
                 </a:solidFill>
                 <a:latin typeface="Amiri" pitchFamily="2" charset="-78"/>
+                <a:ea typeface="Amiri" pitchFamily="2" charset="-78"/>
                 <a:cs typeface="Amiri" pitchFamily="2" charset="-78"/>
               </a:rPr>
               <a:t>لِمَاذَا؟</a:t>
@@ -42216,6 +42471,7 @@
                   <a:srgbClr val="D4AF37"/>
                 </a:solidFill>
                 <a:latin typeface="Amiri" pitchFamily="2" charset="-78"/>
+                <a:ea typeface="Amiri" pitchFamily="2" charset="-78"/>
                 <a:cs typeface="Amiri" pitchFamily="2" charset="-78"/>
               </a:rPr>
               <a:t>م</a:t>
@@ -42536,6 +42792,7 @@
                   <a:srgbClr val="8A6D1E"/>
                 </a:solidFill>
                 <a:latin typeface="Amiri" pitchFamily="2" charset="-78"/>
+                <a:ea typeface="Amiri" pitchFamily="2" charset="-78"/>
                 <a:cs typeface="Amiri" pitchFamily="2" charset="-78"/>
               </a:rPr>
               <a:t>فِي المَقْهَى</a:t>
@@ -42816,6 +43073,7 @@
                   <a:srgbClr val="1B3B6F"/>
                 </a:solidFill>
                 <a:latin typeface="Amiri" pitchFamily="2" charset="-78"/>
+                <a:ea typeface="Amiri" pitchFamily="2" charset="-78"/>
                 <a:cs typeface="Amiri" pitchFamily="2" charset="-78"/>
               </a:rPr>
               <a:t>أُرِيدُ … مِنْ فَضْلِكَ.</a:t>
@@ -42892,6 +43150,7 @@
                   <a:srgbClr val="1B3B6F"/>
                 </a:solidFill>
                 <a:latin typeface="Amiri" pitchFamily="2" charset="-78"/>
+                <a:ea typeface="Amiri" pitchFamily="2" charset="-78"/>
                 <a:cs typeface="Amiri" pitchFamily="2" charset="-78"/>
               </a:rPr>
               <a:t>أَهْلًا وَسَهْلًا! مَاذَا تَشْرَبُ؟</a:t>
@@ -43060,6 +43319,7 @@
                   <a:srgbClr val="1B3B6F"/>
                 </a:solidFill>
                 <a:latin typeface="Amiri" pitchFamily="2" charset="-78"/>
+                <a:ea typeface="Amiri" pitchFamily="2" charset="-78"/>
                 <a:cs typeface="Amiri" pitchFamily="2" charset="-78"/>
               </a:rPr>
               <a:t>بِدُونِ …</a:t>
@@ -43136,6 +43396,7 @@
                   <a:srgbClr val="1B3B6F"/>
                 </a:solidFill>
                 <a:latin typeface="Amiri" pitchFamily="2" charset="-78"/>
+                <a:ea typeface="Amiri" pitchFamily="2" charset="-78"/>
                 <a:cs typeface="Amiri" pitchFamily="2" charset="-78"/>
               </a:rPr>
               <a:t>بِسُكَّرٍ أَمْ بِدُونِ سُكَّرٍ؟</a:t>
@@ -43304,6 +43565,7 @@
                   <a:srgbClr val="1B3B6F"/>
                 </a:solidFill>
                 <a:latin typeface="Amiri" pitchFamily="2" charset="-78"/>
+                <a:ea typeface="Amiri" pitchFamily="2" charset="-78"/>
                 <a:cs typeface="Amiri" pitchFamily="2" charset="-78"/>
               </a:rPr>
               <a:t>سَآكُلُ …</a:t>
@@ -43380,6 +43642,7 @@
                   <a:srgbClr val="1B3B6F"/>
                 </a:solidFill>
                 <a:latin typeface="Amiri" pitchFamily="2" charset="-78"/>
+                <a:ea typeface="Amiri" pitchFamily="2" charset="-78"/>
                 <a:cs typeface="Amiri" pitchFamily="2" charset="-78"/>
               </a:rPr>
               <a:t>وَمَاذَا تَأْكُلُ؟</a:t>
@@ -43548,6 +43811,7 @@
                   <a:srgbClr val="1B3B6F"/>
                 </a:solidFill>
                 <a:latin typeface="Amiri" pitchFamily="2" charset="-78"/>
+                <a:ea typeface="Amiri" pitchFamily="2" charset="-78"/>
                 <a:cs typeface="Amiri" pitchFamily="2" charset="-78"/>
               </a:rPr>
               <a:t>كَمْ …؟</a:t>
@@ -43624,6 +43888,7 @@
                   <a:srgbClr val="1B3B6F"/>
                 </a:solidFill>
                 <a:latin typeface="Amiri" pitchFamily="2" charset="-78"/>
+                <a:ea typeface="Amiri" pitchFamily="2" charset="-78"/>
                 <a:cs typeface="Amiri" pitchFamily="2" charset="-78"/>
               </a:rPr>
               <a:t>حَاضِرٌ.</a:t>
@@ -43792,6 +44057,7 @@
                   <a:srgbClr val="1B3B6F"/>
                 </a:solidFill>
                 <a:latin typeface="Amiri" pitchFamily="2" charset="-78"/>
+                <a:ea typeface="Amiri" pitchFamily="2" charset="-78"/>
                 <a:cs typeface="Amiri" pitchFamily="2" charset="-78"/>
               </a:rPr>
               <a:t>نَعَمْ، أُحِبُّ … لِأَنَّهُ …</a:t>
@@ -43868,6 +44134,7 @@
                   <a:srgbClr val="1B3B6F"/>
                 </a:solidFill>
                 <a:latin typeface="Amiri" pitchFamily="2" charset="-78"/>
+                <a:ea typeface="Amiri" pitchFamily="2" charset="-78"/>
                 <a:cs typeface="Amiri" pitchFamily="2" charset="-78"/>
               </a:rPr>
               <a:t>ثَلَاثَةُ دَنَانِيرَ. هَلْ تُحِبُّ الطَّعَامَ الأُرْدُنِّيَّ؟</a:t>
@@ -44142,6 +44409,7 @@
                   <a:srgbClr val="D4AF37"/>
                 </a:solidFill>
                 <a:latin typeface="Amiri" pitchFamily="2" charset="-78"/>
+                <a:ea typeface="Amiri" pitchFamily="2" charset="-78"/>
                 <a:cs typeface="Amiri" pitchFamily="2" charset="-78"/>
               </a:rPr>
               <a:t>م</a:t>
@@ -44462,6 +44730,7 @@
                   <a:srgbClr val="8A6D1E"/>
                 </a:solidFill>
                 <a:latin typeface="Amiri" pitchFamily="2" charset="-78"/>
+                <a:ea typeface="Amiri" pitchFamily="2" charset="-78"/>
                 <a:cs typeface="Amiri" pitchFamily="2" charset="-78"/>
               </a:rPr>
               <a:t>فِي الصَّيْدَلِيَّةِ</a:t>
@@ -44742,6 +45011,7 @@
                   <a:srgbClr val="1B3B6F"/>
                 </a:solidFill>
                 <a:latin typeface="Amiri" pitchFamily="2" charset="-78"/>
+                <a:ea typeface="Amiri" pitchFamily="2" charset="-78"/>
                 <a:cs typeface="Amiri" pitchFamily="2" charset="-78"/>
               </a:rPr>
               <a:t>عِنْدِي … وَ…</a:t>
@@ -44818,6 +45088,7 @@
                   <a:srgbClr val="1B3B6F"/>
                 </a:solidFill>
                 <a:latin typeface="Amiri" pitchFamily="2" charset="-78"/>
+                <a:ea typeface="Amiri" pitchFamily="2" charset="-78"/>
                 <a:cs typeface="Amiri" pitchFamily="2" charset="-78"/>
               </a:rPr>
               <a:t>مَسَاءَ الخَيْرِ، مَا المُشْكِلَةُ؟</a:t>
@@ -44986,6 +45257,7 @@
                   <a:srgbClr val="1B3B6F"/>
                 </a:solidFill>
                 <a:latin typeface="Amiri" pitchFamily="2" charset="-78"/>
+                <a:ea typeface="Amiri" pitchFamily="2" charset="-78"/>
                 <a:cs typeface="Amiri" pitchFamily="2" charset="-78"/>
               </a:rPr>
               <a:t>مُنْذُ …</a:t>
@@ -45062,6 +45334,7 @@
                   <a:srgbClr val="1B3B6F"/>
                 </a:solidFill>
                 <a:latin typeface="Amiri" pitchFamily="2" charset="-78"/>
+                <a:ea typeface="Amiri" pitchFamily="2" charset="-78"/>
                 <a:cs typeface="Amiri" pitchFamily="2" charset="-78"/>
               </a:rPr>
               <a:t>مُنْذُ مَتَى؟</a:t>
@@ -45230,6 +45503,7 @@
                   <a:srgbClr val="1B3B6F"/>
                 </a:solidFill>
                 <a:latin typeface="Amiri" pitchFamily="2" charset="-78"/>
+                <a:ea typeface="Amiri" pitchFamily="2" charset="-78"/>
                 <a:cs typeface="Amiri" pitchFamily="2" charset="-78"/>
               </a:rPr>
               <a:t>أَكَلْتُ … ثُمَّ …</a:t>
@@ -45306,6 +45580,7 @@
                   <a:srgbClr val="1B3B6F"/>
                 </a:solidFill>
                 <a:latin typeface="Amiri" pitchFamily="2" charset="-78"/>
+                <a:ea typeface="Amiri" pitchFamily="2" charset="-78"/>
                 <a:cs typeface="Amiri" pitchFamily="2" charset="-78"/>
               </a:rPr>
               <a:t>مَاذَا أَكَلْتَ أَمْسِ؟</a:t>
@@ -45409,6 +45684,7 @@
                   <a:srgbClr val="1B3B6F"/>
                 </a:solidFill>
                 <a:latin typeface="Amiri" pitchFamily="2" charset="-78"/>
+                <a:ea typeface="Amiri" pitchFamily="2" charset="-78"/>
                 <a:cs typeface="Amiri" pitchFamily="2" charset="-78"/>
               </a:rPr>
               <a:t>كَمْ مَرَّةً …؟ وَهَلْ …؟</a:t>
@@ -45485,6 +45761,7 @@
                   <a:srgbClr val="1B3B6F"/>
                 </a:solidFill>
                 <a:latin typeface="Amiri" pitchFamily="2" charset="-78"/>
+                <a:ea typeface="Amiri" pitchFamily="2" charset="-78"/>
                 <a:cs typeface="Amiri" pitchFamily="2" charset="-78"/>
               </a:rPr>
               <a:t>خُذْ هٰذِهِ الأَقْرَاصَ.</a:t>
@@ -45588,6 +45865,7 @@
                   <a:srgbClr val="1B3B6F"/>
                 </a:solidFill>
                 <a:latin typeface="Amiri" pitchFamily="2" charset="-78"/>
+                <a:ea typeface="Amiri" pitchFamily="2" charset="-78"/>
                 <a:cs typeface="Amiri" pitchFamily="2" charset="-78"/>
               </a:rPr>
               <a:t>سَأَبْقَى … لِأَنَّ …</a:t>
@@ -45664,6 +45942,7 @@
                   <a:srgbClr val="1B3B6F"/>
                 </a:solidFill>
                 <a:latin typeface="Amiri" pitchFamily="2" charset="-78"/>
+                <a:ea typeface="Amiri" pitchFamily="2" charset="-78"/>
                 <a:cs typeface="Amiri" pitchFamily="2" charset="-78"/>
               </a:rPr>
               <a:t>مَرَّتَيْنِ بَعْدَ الأَكْلِ. وَمَاذَا سَتَفْعَلُ غَدًا؟</a:t>
@@ -45838,13 +46117,9 @@
     <a:fontScheme name="Office">
       <a:majorFont>
         <a:latin typeface="Calibri Light" panose="020F0302020204030204"/>
-        <a:ea typeface=""/>
-        <a:cs typeface=""/>
-        <a:font script="Jpan" typeface="游ゴシック Light"/>
-        <a:font script="Hang" typeface="맑은 고딕"/>
-        <a:font script="Hans" typeface="等线 Light"/>
-        <a:font script="Hant" typeface="新細明體"/>
-        <a:font script="Arab" typeface="Times New Roman"/>
+        <a:ea typeface="Amiri" pitchFamily="2" charset="-78"/>
+        <a:cs typeface="Amiri" pitchFamily="2" charset="-78"/>
+        <a:font script="Arab" typeface="Amiri"/>
         <a:font script="Hebr" typeface="Times New Roman"/>
         <a:font script="Thai" typeface="Angsana New"/>
         <a:font script="Ethi" typeface="Nyala"/>
@@ -45890,13 +46165,9 @@
       </a:majorFont>
       <a:minorFont>
         <a:latin typeface="Calibri" panose="020F0502020204030204"/>
-        <a:ea typeface=""/>
-        <a:cs typeface=""/>
-        <a:font script="Jpan" typeface="游ゴシック"/>
-        <a:font script="Hang" typeface="맑은 고딕"/>
-        <a:font script="Hans" typeface="等线"/>
-        <a:font script="Hant" typeface="新細明體"/>
-        <a:font script="Arab" typeface="Arial"/>
+        <a:ea typeface="Amiri" pitchFamily="2" charset="-78"/>
+        <a:cs typeface="Amiri" pitchFamily="2" charset="-78"/>
+        <a:font script="Arab" typeface="Amiri"/>
         <a:font script="Hebr" typeface="Arial"/>
         <a:font script="Thai" typeface="Cordia New"/>
         <a:font script="Ethi" typeface="Nyala"/>
